--- a/cloudflare-deploy/public/library/student/student-kr.pptx
+++ b/cloudflare-deploy/public/library/student/student-kr.pptx
@@ -50,6 +50,9 @@
     <p:sldId id="298" r:id="rId49"/>
     <p:sldId id="299" r:id="rId50"/>
     <p:sldId id="300" r:id="rId51"/>
+    <p:sldId id="301" r:id="rId52"/>
+    <p:sldId id="302" r:id="rId53"/>
+    <p:sldId id="303" r:id="rId54"/>
   </p:sldIdLst>
   <p:sldSz cx="12191695" cy="6858000" type="screen4x3"/>
   <p:notesSz cx="6858000" cy="9144000"/>
@@ -35648,6 +35651,3019 @@
 </file>
 
 <file path=ppt/slides/slide40.xml><?xml version="1.0" encoding="utf-8"?>
+<p:sld xmlns:a="http://schemas.openxmlformats.org/drawingml/2006/main" xmlns:p="http://schemas.openxmlformats.org/presentationml/2006/main" xmlns:r="http://schemas.openxmlformats.org/officeDocument/2006/relationships">
+  <p:cSld>
+    <p:bg>
+      <p:bgPr>
+        <a:solidFill>
+          <a:srgbClr val="FFFFFF"/>
+        </a:solidFill>
+        <a:effectLst/>
+      </p:bgPr>
+    </p:bg>
+    <p:spTree>
+      <p:nvGrpSpPr>
+        <p:cNvPr id="1" name=""/>
+        <p:cNvGrpSpPr/>
+        <p:nvPr/>
+      </p:nvGrpSpPr>
+      <p:grpSpPr/>
+      <p:sp>
+        <p:nvSpPr>
+          <p:cNvPr id="2" name="Rectangle 1"/>
+          <p:cNvSpPr/>
+          <p:nvPr/>
+        </p:nvSpPr>
+        <p:spPr>
+          <a:xfrm>
+            <a:off x="0" y="0"/>
+            <a:ext cx="12191695" cy="566928"/>
+          </a:xfrm>
+          <a:prstGeom prst="rect">
+            <a:avLst/>
+          </a:prstGeom>
+          <a:solidFill>
+            <a:srgbClr val="7C3AED"/>
+          </a:solidFill>
+          <a:ln>
+            <a:noFill/>
+          </a:ln>
+          <a:effectLst/>
+        </p:spPr>
+        <p:style>
+          <a:lnRef idx="1">
+            <a:schemeClr val="accent1"/>
+          </a:lnRef>
+          <a:fillRef idx="3">
+            <a:schemeClr val="accent1"/>
+          </a:fillRef>
+          <a:effectRef idx="2">
+            <a:schemeClr val="accent1"/>
+          </a:effectRef>
+          <a:fontRef idx="minor">
+            <a:schemeClr val="lt1"/>
+          </a:fontRef>
+        </p:style>
+        <p:txBody>
+          <a:bodyPr rtlCol="0" anchor="ctr"/>
+          <a:lstStyle/>
+          <a:p>
+            <a:pPr algn="ctr"/>
+          </a:p>
+        </p:txBody>
+      </p:sp>
+      <p:sp>
+        <p:nvSpPr>
+          <p:cNvPr id="3" name="Rectangle 2"/>
+          <p:cNvSpPr/>
+          <p:nvPr/>
+        </p:nvSpPr>
+        <p:spPr>
+          <a:xfrm>
+            <a:off x="0" y="566928"/>
+            <a:ext cx="12191695" cy="54864"/>
+          </a:xfrm>
+          <a:prstGeom prst="rect">
+            <a:avLst/>
+          </a:prstGeom>
+          <a:solidFill>
+            <a:srgbClr val="FF9F1C"/>
+          </a:solidFill>
+          <a:ln>
+            <a:noFill/>
+          </a:ln>
+          <a:effectLst/>
+        </p:spPr>
+        <p:style>
+          <a:lnRef idx="1">
+            <a:schemeClr val="accent1"/>
+          </a:lnRef>
+          <a:fillRef idx="3">
+            <a:schemeClr val="accent1"/>
+          </a:fillRef>
+          <a:effectRef idx="2">
+            <a:schemeClr val="accent1"/>
+          </a:effectRef>
+          <a:fontRef idx="minor">
+            <a:schemeClr val="lt1"/>
+          </a:fontRef>
+        </p:style>
+        <p:txBody>
+          <a:bodyPr rtlCol="0" anchor="ctr"/>
+          <a:lstStyle/>
+          <a:p>
+            <a:pPr algn="ctr"/>
+          </a:p>
+        </p:txBody>
+      </p:sp>
+      <p:sp>
+        <p:nvSpPr>
+          <p:cNvPr id="4" name="TextBox 3"/>
+          <p:cNvSpPr txBox="1"/>
+          <p:nvPr/>
+        </p:nvSpPr>
+        <p:spPr>
+          <a:xfrm>
+            <a:off x="365760" y="27432"/>
+            <a:ext cx="7315200" cy="502920"/>
+          </a:xfrm>
+          <a:prstGeom prst="rect">
+            <a:avLst/>
+          </a:prstGeom>
+          <a:noFill/>
+        </p:spPr>
+        <p:txBody>
+          <a:bodyPr wrap="square" anchor="ctr">
+            <a:spAutoFit/>
+          </a:bodyPr>
+          <a:lstStyle/>
+          <a:p>
+            <a:pPr algn="l">
+              <a:lnSpc>
+                <a:spcPct val="100000"/>
+              </a:lnSpc>
+            </a:pPr>
+            <a:r>
+              <a:rPr sz="1500" b="1">
+                <a:solidFill>
+                  <a:srgbClr val="FFFFFF"/>
+                </a:solidFill>
+                <a:latin typeface="Malgun Gothic"/>
+              </a:rPr>
+              <a:t>🎒 망고아이 학생용 사용설명서</a:t>
+            </a:r>
+          </a:p>
+        </p:txBody>
+      </p:sp>
+      <p:sp>
+        <p:nvSpPr>
+          <p:cNvPr id="5" name="TextBox 4"/>
+          <p:cNvSpPr txBox="1"/>
+          <p:nvPr/>
+        </p:nvSpPr>
+        <p:spPr>
+          <a:xfrm>
+            <a:off x="8168335" y="27432"/>
+            <a:ext cx="3657600" cy="502920"/>
+          </a:xfrm>
+          <a:prstGeom prst="rect">
+            <a:avLst/>
+          </a:prstGeom>
+          <a:noFill/>
+        </p:spPr>
+        <p:txBody>
+          <a:bodyPr wrap="square" anchor="ctr">
+            <a:spAutoFit/>
+          </a:bodyPr>
+          <a:lstStyle/>
+          <a:p>
+            <a:pPr algn="r">
+              <a:lnSpc>
+                <a:spcPct val="100000"/>
+              </a:lnSpc>
+            </a:pPr>
+            <a:r>
+              <a:rPr sz="1300" b="1">
+                <a:solidFill>
+                  <a:srgbClr val="F1F5F9"/>
+                </a:solidFill>
+                <a:latin typeface="Malgun Gothic"/>
+              </a:rPr>
+              <a:t>주요 기능 사용법</a:t>
+            </a:r>
+          </a:p>
+        </p:txBody>
+      </p:sp>
+      <p:sp>
+        <p:nvSpPr>
+          <p:cNvPr id="6" name="Rounded Rectangle 5"/>
+          <p:cNvSpPr/>
+          <p:nvPr/>
+        </p:nvSpPr>
+        <p:spPr>
+          <a:xfrm>
+            <a:off x="365760" y="822960"/>
+            <a:ext cx="868680" cy="868680"/>
+          </a:xfrm>
+          <a:prstGeom prst="roundRect">
+            <a:avLst/>
+          </a:prstGeom>
+          <a:solidFill>
+            <a:srgbClr val="7C3AED"/>
+          </a:solidFill>
+          <a:ln>
+            <a:noFill/>
+          </a:ln>
+          <a:effectLst/>
+        </p:spPr>
+        <p:style>
+          <a:lnRef idx="1">
+            <a:schemeClr val="accent1"/>
+          </a:lnRef>
+          <a:fillRef idx="3">
+            <a:schemeClr val="accent1"/>
+          </a:fillRef>
+          <a:effectRef idx="2">
+            <a:schemeClr val="accent1"/>
+          </a:effectRef>
+          <a:fontRef idx="minor">
+            <a:schemeClr val="lt1"/>
+          </a:fontRef>
+        </p:style>
+        <p:txBody>
+          <a:bodyPr rtlCol="0" anchor="ctr"/>
+          <a:lstStyle/>
+          <a:p>
+            <a:pPr algn="ctr"/>
+          </a:p>
+        </p:txBody>
+      </p:sp>
+      <p:sp>
+        <p:nvSpPr>
+          <p:cNvPr id="7" name="TextBox 6"/>
+          <p:cNvSpPr txBox="1"/>
+          <p:nvPr/>
+        </p:nvSpPr>
+        <p:spPr>
+          <a:xfrm>
+            <a:off x="365760" y="822960"/>
+            <a:ext cx="868680" cy="868680"/>
+          </a:xfrm>
+          <a:prstGeom prst="rect">
+            <a:avLst/>
+          </a:prstGeom>
+          <a:noFill/>
+        </p:spPr>
+        <p:txBody>
+          <a:bodyPr wrap="square" anchor="ctr">
+            <a:spAutoFit/>
+          </a:bodyPr>
+          <a:lstStyle/>
+          <a:p>
+            <a:pPr algn="ctr">
+              <a:lnSpc>
+                <a:spcPct val="100000"/>
+              </a:lnSpc>
+            </a:pPr>
+            <a:r>
+              <a:rPr sz="2600" b="1">
+                <a:solidFill>
+                  <a:srgbClr val="FFFFFF"/>
+                </a:solidFill>
+                <a:latin typeface="Malgun Gothic"/>
+              </a:rPr>
+              <a:t>38</a:t>
+            </a:r>
+          </a:p>
+        </p:txBody>
+      </p:sp>
+      <p:sp>
+        <p:nvSpPr>
+          <p:cNvPr id="8" name="TextBox 7"/>
+          <p:cNvSpPr txBox="1"/>
+          <p:nvPr/>
+        </p:nvSpPr>
+        <p:spPr>
+          <a:xfrm>
+            <a:off x="1371600" y="822960"/>
+            <a:ext cx="10424160" cy="502920"/>
+          </a:xfrm>
+          <a:prstGeom prst="rect">
+            <a:avLst/>
+          </a:prstGeom>
+          <a:noFill/>
+        </p:spPr>
+        <p:txBody>
+          <a:bodyPr wrap="square" anchor="t">
+            <a:spAutoFit/>
+          </a:bodyPr>
+          <a:lstStyle/>
+          <a:p>
+            <a:pPr algn="l">
+              <a:lnSpc>
+                <a:spcPct val="100000"/>
+              </a:lnSpc>
+            </a:pPr>
+            <a:r>
+              <a:rPr sz="2300" b="1">
+                <a:solidFill>
+                  <a:srgbClr val="1E2340"/>
+                </a:solidFill>
+                <a:latin typeface="Malgun Gothic"/>
+              </a:rPr>
+              <a:t>📔 AI 음성 일기</a:t>
+            </a:r>
+          </a:p>
+        </p:txBody>
+      </p:sp>
+      <p:sp>
+        <p:nvSpPr>
+          <p:cNvPr id="9" name="TextBox 8"/>
+          <p:cNvSpPr txBox="1"/>
+          <p:nvPr/>
+        </p:nvSpPr>
+        <p:spPr>
+          <a:xfrm>
+            <a:off x="1417320" y="1353312"/>
+            <a:ext cx="10424160" cy="320040"/>
+          </a:xfrm>
+          <a:prstGeom prst="rect">
+            <a:avLst/>
+          </a:prstGeom>
+          <a:noFill/>
+        </p:spPr>
+        <p:txBody>
+          <a:bodyPr wrap="square" anchor="t">
+            <a:spAutoFit/>
+          </a:bodyPr>
+          <a:lstStyle/>
+          <a:p>
+            <a:pPr algn="l">
+              <a:lnSpc>
+                <a:spcPct val="100000"/>
+              </a:lnSpc>
+            </a:pPr>
+            <a:r>
+              <a:rPr sz="1300" b="0">
+                <a:solidFill>
+                  <a:srgbClr val="64748B"/>
+                </a:solidFill>
+                <a:latin typeface="Malgun Gothic"/>
+              </a:rPr>
+              <a:t>오늘 하루를 영어로 말하면 AI가 첨삭해줘요</a:t>
+            </a:r>
+          </a:p>
+        </p:txBody>
+      </p:sp>
+      <p:sp>
+        <p:nvSpPr>
+          <p:cNvPr id="10" name="Rounded Rectangle 9"/>
+          <p:cNvSpPr/>
+          <p:nvPr/>
+        </p:nvSpPr>
+        <p:spPr>
+          <a:xfrm>
+            <a:off x="365760" y="1828800"/>
+            <a:ext cx="11430000" cy="777240"/>
+          </a:xfrm>
+          <a:prstGeom prst="roundRect">
+            <a:avLst/>
+          </a:prstGeom>
+          <a:solidFill>
+            <a:srgbClr val="F3F0FF"/>
+          </a:solidFill>
+          <a:ln>
+            <a:noFill/>
+          </a:ln>
+          <a:effectLst/>
+        </p:spPr>
+        <p:style>
+          <a:lnRef idx="1">
+            <a:schemeClr val="accent1"/>
+          </a:lnRef>
+          <a:fillRef idx="3">
+            <a:schemeClr val="accent1"/>
+          </a:fillRef>
+          <a:effectRef idx="2">
+            <a:schemeClr val="accent1"/>
+          </a:effectRef>
+          <a:fontRef idx="minor">
+            <a:schemeClr val="lt1"/>
+          </a:fontRef>
+        </p:style>
+        <p:txBody>
+          <a:bodyPr rtlCol="0" anchor="ctr"/>
+          <a:lstStyle/>
+          <a:p>
+            <a:pPr algn="ctr"/>
+          </a:p>
+        </p:txBody>
+      </p:sp>
+      <p:sp>
+        <p:nvSpPr>
+          <p:cNvPr id="11" name="TextBox 10"/>
+          <p:cNvSpPr txBox="1"/>
+          <p:nvPr/>
+        </p:nvSpPr>
+        <p:spPr>
+          <a:xfrm>
+            <a:off x="548640" y="1901952"/>
+            <a:ext cx="11064240" cy="640080"/>
+          </a:xfrm>
+          <a:prstGeom prst="rect">
+            <a:avLst/>
+          </a:prstGeom>
+          <a:noFill/>
+        </p:spPr>
+        <p:txBody>
+          <a:bodyPr wrap="square" anchor="t">
+            <a:spAutoFit/>
+          </a:bodyPr>
+          <a:lstStyle/>
+          <a:p>
+            <a:pPr algn="l">
+              <a:lnSpc>
+                <a:spcPct val="115000"/>
+              </a:lnSpc>
+            </a:pPr>
+            <a:r>
+              <a:rPr sz="1200" b="0">
+                <a:solidFill>
+                  <a:srgbClr val="334155"/>
+                </a:solidFill>
+                <a:latin typeface="Malgun Gothic"/>
+              </a:rPr>
+              <a:t>오늘 있었던 일을 영어로 말하면, AI가 내 발음을 글로 옮겨 적고(전사) 문장을 자연스럽게 첨삭한 뒤 점수와 칭찬을 남겨줘요. 매일 조금씩 쌓이면 나만의 영어 일기장이 완성돼요!</a:t>
+            </a:r>
+          </a:p>
+        </p:txBody>
+      </p:sp>
+      <p:sp>
+        <p:nvSpPr>
+          <p:cNvPr id="12" name="TextBox 11"/>
+          <p:cNvSpPr txBox="1"/>
+          <p:nvPr/>
+        </p:nvSpPr>
+        <p:spPr>
+          <a:xfrm>
+            <a:off x="457200" y="2743200"/>
+            <a:ext cx="5669280" cy="320040"/>
+          </a:xfrm>
+          <a:prstGeom prst="rect">
+            <a:avLst/>
+          </a:prstGeom>
+          <a:noFill/>
+        </p:spPr>
+        <p:txBody>
+          <a:bodyPr wrap="square" anchor="t">
+            <a:spAutoFit/>
+          </a:bodyPr>
+          <a:lstStyle/>
+          <a:p>
+            <a:pPr algn="l">
+              <a:lnSpc>
+                <a:spcPct val="100000"/>
+              </a:lnSpc>
+            </a:pPr>
+            <a:r>
+              <a:rPr sz="1350" b="1">
+                <a:solidFill>
+                  <a:srgbClr val="7C3AED"/>
+                </a:solidFill>
+                <a:latin typeface="Malgun Gothic"/>
+              </a:rPr>
+              <a:t>사용 방법</a:t>
+            </a:r>
+          </a:p>
+        </p:txBody>
+      </p:sp>
+      <p:sp>
+        <p:nvSpPr>
+          <p:cNvPr id="13" name="TextBox 12"/>
+          <p:cNvSpPr txBox="1"/>
+          <p:nvPr/>
+        </p:nvSpPr>
+        <p:spPr>
+          <a:xfrm>
+            <a:off x="457200" y="3108960"/>
+            <a:ext cx="5669280" cy="2377440"/>
+          </a:xfrm>
+          <a:prstGeom prst="rect">
+            <a:avLst/>
+          </a:prstGeom>
+          <a:noFill/>
+        </p:spPr>
+        <p:txBody>
+          <a:bodyPr wrap="square">
+            <a:spAutoFit/>
+          </a:bodyPr>
+          <a:lstStyle/>
+          <a:p>
+            <a:pPr>
+              <a:lnSpc>
+                <a:spcPct val="115000"/>
+              </a:lnSpc>
+              <a:spcAft>
+                <a:spcPts val="600"/>
+              </a:spcAft>
+            </a:pPr>
+            <a:r>
+              <a:rPr sz="1050" b="1">
+                <a:solidFill>
+                  <a:srgbClr val="7C3AED"/>
+                </a:solidFill>
+                <a:latin typeface="Malgun Gothic"/>
+              </a:rPr>
+              <a:t>● </a:t>
+            </a:r>
+            <a:r>
+              <a:rPr sz="1250">
+                <a:solidFill>
+                  <a:srgbClr val="334155"/>
+                </a:solidFill>
+                <a:latin typeface="Malgun Gothic"/>
+              </a:rPr>
+              <a:t>홈 메뉴에서 📔 AI 음성 일기 카드를 눌러요. (영어·중국어 발음 코치 카드 옆)</a:t>
+            </a:r>
+          </a:p>
+          <a:p>
+            <a:pPr>
+              <a:lnSpc>
+                <a:spcPct val="115000"/>
+              </a:lnSpc>
+              <a:spcAft>
+                <a:spcPts val="600"/>
+              </a:spcAft>
+            </a:pPr>
+            <a:r>
+              <a:rPr sz="1050" b="1">
+                <a:solidFill>
+                  <a:srgbClr val="7C3AED"/>
+                </a:solidFill>
+                <a:latin typeface="Malgun Gothic"/>
+              </a:rPr>
+              <a:t>● </a:t>
+            </a:r>
+            <a:r>
+              <a:rPr sz="1250">
+                <a:solidFill>
+                  <a:srgbClr val="334155"/>
+                </a:solidFill>
+                <a:latin typeface="Malgun Gothic"/>
+              </a:rPr>
+              <a:t>🎤 녹음 탭에서 ‘녹음 시작’을 누르고 오늘 하루를 영어로 말해요. (30초 정도면 충분!)</a:t>
+            </a:r>
+          </a:p>
+          <a:p>
+            <a:pPr>
+              <a:lnSpc>
+                <a:spcPct val="115000"/>
+              </a:lnSpc>
+              <a:spcAft>
+                <a:spcPts val="600"/>
+              </a:spcAft>
+            </a:pPr>
+            <a:r>
+              <a:rPr sz="1050" b="1">
+                <a:solidFill>
+                  <a:srgbClr val="7C3AED"/>
+                </a:solidFill>
+                <a:latin typeface="Malgun Gothic"/>
+              </a:rPr>
+              <a:t>● </a:t>
+            </a:r>
+            <a:r>
+              <a:rPr sz="1250">
+                <a:solidFill>
+                  <a:srgbClr val="334155"/>
+                </a:solidFill>
+                <a:latin typeface="Malgun Gothic"/>
+              </a:rPr>
+              <a:t>‘정지’를 누르면 AI가 자동으로 전사 → 첨삭 → 점수·칭찬을 만들어줘요.</a:t>
+            </a:r>
+          </a:p>
+          <a:p>
+            <a:pPr>
+              <a:lnSpc>
+                <a:spcPct val="115000"/>
+              </a:lnSpc>
+              <a:spcAft>
+                <a:spcPts val="600"/>
+              </a:spcAft>
+            </a:pPr>
+            <a:r>
+              <a:rPr sz="1050" b="1">
+                <a:solidFill>
+                  <a:srgbClr val="7C3AED"/>
+                </a:solidFill>
+                <a:latin typeface="Malgun Gothic"/>
+              </a:rPr>
+              <a:t>● </a:t>
+            </a:r>
+            <a:r>
+              <a:rPr sz="1250">
+                <a:solidFill>
+                  <a:srgbClr val="334155"/>
+                </a:solidFill>
+                <a:latin typeface="Malgun Gothic"/>
+              </a:rPr>
+              <a:t>📅 캘린더 탭에서 지난 일기를 날짜별로 다시 볼 수 있어요.</a:t>
+            </a:r>
+          </a:p>
+        </p:txBody>
+      </p:sp>
+      <p:sp>
+        <p:nvSpPr>
+          <p:cNvPr id="14" name="Rounded Rectangle 13"/>
+          <p:cNvSpPr/>
+          <p:nvPr/>
+        </p:nvSpPr>
+        <p:spPr>
+          <a:xfrm>
+            <a:off x="457200" y="4782312"/>
+            <a:ext cx="5669280" cy="1316736"/>
+          </a:xfrm>
+          <a:prstGeom prst="roundRect">
+            <a:avLst/>
+          </a:prstGeom>
+          <a:solidFill>
+            <a:srgbClr val="F4F7FF"/>
+          </a:solidFill>
+          <a:ln w="12700">
+            <a:solidFill>
+              <a:srgbClr val="7C3AED"/>
+            </a:solidFill>
+          </a:ln>
+          <a:effectLst/>
+        </p:spPr>
+        <p:style>
+          <a:lnRef idx="1">
+            <a:schemeClr val="accent1"/>
+          </a:lnRef>
+          <a:fillRef idx="3">
+            <a:schemeClr val="accent1"/>
+          </a:fillRef>
+          <a:effectRef idx="2">
+            <a:schemeClr val="accent1"/>
+          </a:effectRef>
+          <a:fontRef idx="minor">
+            <a:schemeClr val="lt1"/>
+          </a:fontRef>
+        </p:style>
+        <p:txBody>
+          <a:bodyPr rtlCol="0" anchor="ctr"/>
+          <a:lstStyle/>
+          <a:p>
+            <a:pPr algn="ctr"/>
+          </a:p>
+        </p:txBody>
+      </p:sp>
+      <p:sp>
+        <p:nvSpPr>
+          <p:cNvPr id="15" name="TextBox 14"/>
+          <p:cNvSpPr txBox="1"/>
+          <p:nvPr/>
+        </p:nvSpPr>
+        <p:spPr>
+          <a:xfrm>
+            <a:off x="594360" y="4837175"/>
+            <a:ext cx="5394960" cy="274320"/>
+          </a:xfrm>
+          <a:prstGeom prst="rect">
+            <a:avLst/>
+          </a:prstGeom>
+          <a:noFill/>
+        </p:spPr>
+        <p:txBody>
+          <a:bodyPr wrap="square" anchor="t">
+            <a:spAutoFit/>
+          </a:bodyPr>
+          <a:lstStyle/>
+          <a:p>
+            <a:pPr algn="l">
+              <a:lnSpc>
+                <a:spcPct val="100000"/>
+              </a:lnSpc>
+            </a:pPr>
+            <a:r>
+              <a:rPr sz="1150" b="1">
+                <a:solidFill>
+                  <a:srgbClr val="7C3AED"/>
+                </a:solidFill>
+                <a:latin typeface="Malgun Gothic"/>
+              </a:rPr>
+              <a:t>✅ 핵심 포인트</a:t>
+            </a:r>
+          </a:p>
+        </p:txBody>
+      </p:sp>
+      <p:sp>
+        <p:nvSpPr>
+          <p:cNvPr id="16" name="TextBox 15"/>
+          <p:cNvSpPr txBox="1"/>
+          <p:nvPr/>
+        </p:nvSpPr>
+        <p:spPr>
+          <a:xfrm>
+            <a:off x="594360" y="5111496"/>
+            <a:ext cx="5394960" cy="950976"/>
+          </a:xfrm>
+          <a:prstGeom prst="rect">
+            <a:avLst/>
+          </a:prstGeom>
+          <a:noFill/>
+        </p:spPr>
+        <p:txBody>
+          <a:bodyPr wrap="square">
+            <a:spAutoFit/>
+          </a:bodyPr>
+          <a:lstStyle/>
+          <a:p>
+            <a:pPr>
+              <a:lnSpc>
+                <a:spcPct val="115000"/>
+              </a:lnSpc>
+              <a:spcAft>
+                <a:spcPts val="200"/>
+              </a:spcAft>
+            </a:pPr>
+            <a:r>
+              <a:rPr sz="900" b="1">
+                <a:solidFill>
+                  <a:srgbClr val="7C3AED"/>
+                </a:solidFill>
+                <a:latin typeface="Malgun Gothic"/>
+              </a:rPr>
+              <a:t>● </a:t>
+            </a:r>
+            <a:r>
+              <a:rPr sz="1100">
+                <a:solidFill>
+                  <a:srgbClr val="334155"/>
+                </a:solidFill>
+                <a:latin typeface="Malgun Gothic"/>
+              </a:rPr>
+              <a:t>말한 영어를 글로 바꿔주고, 어색한 문장을 자연스럽게 고쳐줘요.</a:t>
+            </a:r>
+          </a:p>
+          <a:p>
+            <a:pPr>
+              <a:lnSpc>
+                <a:spcPct val="115000"/>
+              </a:lnSpc>
+              <a:spcAft>
+                <a:spcPts val="200"/>
+              </a:spcAft>
+            </a:pPr>
+            <a:r>
+              <a:rPr sz="900" b="1">
+                <a:solidFill>
+                  <a:srgbClr val="7C3AED"/>
+                </a:solidFill>
+                <a:latin typeface="Malgun Gothic"/>
+              </a:rPr>
+              <a:t>● </a:t>
+            </a:r>
+            <a:r>
+              <a:rPr sz="1100">
+                <a:solidFill>
+                  <a:srgbClr val="334155"/>
+                </a:solidFill>
+                <a:latin typeface="Malgun Gothic"/>
+              </a:rPr>
+              <a:t>점수(0~100)와 한국어 격려 한마디로 매일 동기부여가 돼요.</a:t>
+            </a:r>
+          </a:p>
+          <a:p>
+            <a:pPr>
+              <a:lnSpc>
+                <a:spcPct val="115000"/>
+              </a:lnSpc>
+              <a:spcAft>
+                <a:spcPts val="200"/>
+              </a:spcAft>
+            </a:pPr>
+            <a:r>
+              <a:rPr sz="900" b="1">
+                <a:solidFill>
+                  <a:srgbClr val="7C3AED"/>
+                </a:solidFill>
+                <a:latin typeface="Malgun Gothic"/>
+              </a:rPr>
+              <a:t>● </a:t>
+            </a:r>
+            <a:r>
+              <a:rPr sz="1100">
+                <a:solidFill>
+                  <a:srgbClr val="334155"/>
+                </a:solidFill>
+                <a:latin typeface="Malgun Gothic"/>
+              </a:rPr>
+              <a:t>매일 하면 연속출석·배지와도 연결돼 꾸준함이 실력이 돼요.</a:t>
+            </a:r>
+          </a:p>
+        </p:txBody>
+      </p:sp>
+      <p:sp>
+        <p:nvSpPr>
+          <p:cNvPr id="17" name="Rounded Rectangle 16"/>
+          <p:cNvSpPr/>
+          <p:nvPr/>
+        </p:nvSpPr>
+        <p:spPr>
+          <a:xfrm>
+            <a:off x="457200" y="6208775"/>
+            <a:ext cx="5669280" cy="640080"/>
+          </a:xfrm>
+          <a:prstGeom prst="roundRect">
+            <a:avLst/>
+          </a:prstGeom>
+          <a:solidFill>
+            <a:srgbClr val="FFFBEB"/>
+          </a:solidFill>
+          <a:ln w="12700">
+            <a:solidFill>
+              <a:srgbClr val="F59E0B"/>
+            </a:solidFill>
+          </a:ln>
+          <a:effectLst/>
+        </p:spPr>
+        <p:style>
+          <a:lnRef idx="1">
+            <a:schemeClr val="accent1"/>
+          </a:lnRef>
+          <a:fillRef idx="3">
+            <a:schemeClr val="accent1"/>
+          </a:fillRef>
+          <a:effectRef idx="2">
+            <a:schemeClr val="accent1"/>
+          </a:effectRef>
+          <a:fontRef idx="minor">
+            <a:schemeClr val="lt1"/>
+          </a:fontRef>
+        </p:style>
+        <p:txBody>
+          <a:bodyPr rtlCol="0" anchor="ctr"/>
+          <a:lstStyle/>
+          <a:p>
+            <a:pPr algn="ctr"/>
+          </a:p>
+        </p:txBody>
+      </p:sp>
+      <p:sp>
+        <p:nvSpPr>
+          <p:cNvPr id="18" name="TextBox 17"/>
+          <p:cNvSpPr txBox="1"/>
+          <p:nvPr/>
+        </p:nvSpPr>
+        <p:spPr>
+          <a:xfrm>
+            <a:off x="594360" y="6254495"/>
+            <a:ext cx="5394960" cy="548640"/>
+          </a:xfrm>
+          <a:prstGeom prst="rect">
+            <a:avLst/>
+          </a:prstGeom>
+          <a:noFill/>
+        </p:spPr>
+        <p:txBody>
+          <a:bodyPr wrap="square" anchor="t">
+            <a:spAutoFit/>
+          </a:bodyPr>
+          <a:lstStyle/>
+          <a:p>
+            <a:pPr algn="l">
+              <a:lnSpc>
+                <a:spcPct val="105000"/>
+              </a:lnSpc>
+            </a:pPr>
+            <a:r>
+              <a:rPr sz="1050" b="0">
+                <a:solidFill>
+                  <a:srgbClr val="92670A"/>
+                </a:solidFill>
+                <a:latin typeface="Malgun Gothic"/>
+              </a:rPr>
+              <a:t>⚠️ 알아두기 · 녹음은 로그인한 뒤 사용할 수 있어요. 조용한 곳에서 또박또박 말하면 전사가 더 정확해요.</a:t>
+            </a:r>
+          </a:p>
+        </p:txBody>
+      </p:sp>
+      <p:sp>
+        <p:nvSpPr>
+          <p:cNvPr id="19" name="Rounded Rectangle 18"/>
+          <p:cNvSpPr/>
+          <p:nvPr/>
+        </p:nvSpPr>
+        <p:spPr>
+          <a:xfrm>
+            <a:off x="457200" y="6940295"/>
+            <a:ext cx="5669280" cy="658368"/>
+          </a:xfrm>
+          <a:prstGeom prst="roundRect">
+            <a:avLst/>
+          </a:prstGeom>
+          <a:solidFill>
+            <a:srgbClr val="FFF7E6"/>
+          </a:solidFill>
+          <a:ln w="12700">
+            <a:solidFill>
+              <a:srgbClr val="FF9F1C"/>
+            </a:solidFill>
+          </a:ln>
+          <a:effectLst/>
+        </p:spPr>
+        <p:style>
+          <a:lnRef idx="1">
+            <a:schemeClr val="accent1"/>
+          </a:lnRef>
+          <a:fillRef idx="3">
+            <a:schemeClr val="accent1"/>
+          </a:fillRef>
+          <a:effectRef idx="2">
+            <a:schemeClr val="accent1"/>
+          </a:effectRef>
+          <a:fontRef idx="minor">
+            <a:schemeClr val="lt1"/>
+          </a:fontRef>
+        </p:style>
+        <p:txBody>
+          <a:bodyPr rtlCol="0" anchor="ctr"/>
+          <a:lstStyle/>
+          <a:p>
+            <a:pPr algn="ctr"/>
+          </a:p>
+        </p:txBody>
+      </p:sp>
+      <p:sp>
+        <p:nvSpPr>
+          <p:cNvPr id="20" name="TextBox 19"/>
+          <p:cNvSpPr txBox="1"/>
+          <p:nvPr/>
+        </p:nvSpPr>
+        <p:spPr>
+          <a:xfrm>
+            <a:off x="594360" y="6986015"/>
+            <a:ext cx="5394960" cy="566928"/>
+          </a:xfrm>
+          <a:prstGeom prst="rect">
+            <a:avLst/>
+          </a:prstGeom>
+          <a:noFill/>
+        </p:spPr>
+        <p:txBody>
+          <a:bodyPr wrap="square" anchor="t">
+            <a:spAutoFit/>
+          </a:bodyPr>
+          <a:lstStyle/>
+          <a:p>
+            <a:pPr algn="l">
+              <a:lnSpc>
+                <a:spcPct val="105000"/>
+              </a:lnSpc>
+            </a:pPr>
+            <a:r>
+              <a:rPr sz="1050" b="0">
+                <a:solidFill>
+                  <a:srgbClr val="5B4A2A"/>
+                </a:solidFill>
+                <a:latin typeface="Malgun Gothic"/>
+              </a:rPr>
+              <a:t>💡 꿀팁 · 완벽한 문장이 아니어도 괜찮아요. 매일 ‘한 문장’이라도 말하는 습관이 가장 중요해요!</a:t>
+            </a:r>
+          </a:p>
+        </p:txBody>
+      </p:sp>
+      <p:sp>
+        <p:nvSpPr>
+          <p:cNvPr id="21" name="Rectangle 20"/>
+          <p:cNvSpPr/>
+          <p:nvPr/>
+        </p:nvSpPr>
+        <p:spPr>
+          <a:xfrm>
+            <a:off x="6300216" y="2345436"/>
+            <a:ext cx="5596128" cy="3538728"/>
+          </a:xfrm>
+          <a:prstGeom prst="rect">
+            <a:avLst/>
+          </a:prstGeom>
+          <a:solidFill>
+            <a:srgbClr val="FFFFFF"/>
+          </a:solidFill>
+          <a:ln w="12700">
+            <a:solidFill>
+              <a:srgbClr val="E2E8F0"/>
+            </a:solidFill>
+          </a:ln>
+          <a:effectLst/>
+        </p:spPr>
+        <p:style>
+          <a:lnRef idx="1">
+            <a:schemeClr val="accent1"/>
+          </a:lnRef>
+          <a:fillRef idx="3">
+            <a:schemeClr val="accent1"/>
+          </a:fillRef>
+          <a:effectRef idx="2">
+            <a:schemeClr val="accent1"/>
+          </a:effectRef>
+          <a:fontRef idx="minor">
+            <a:schemeClr val="lt1"/>
+          </a:fontRef>
+        </p:style>
+        <p:txBody>
+          <a:bodyPr rtlCol="0" anchor="ctr"/>
+          <a:lstStyle/>
+          <a:p>
+            <a:pPr algn="ctr"/>
+          </a:p>
+        </p:txBody>
+      </p:sp>
+      <p:pic>
+        <p:nvPicPr>
+          <p:cNvPr id="22" name="Picture 21" descr="student_voicediary.jpg"/>
+          <p:cNvPicPr>
+            <a:picLocks noChangeAspect="1"/>
+          </p:cNvPicPr>
+          <p:nvPr/>
+        </p:nvPicPr>
+        <p:blipFill>
+          <a:blip r:embed="rId2"/>
+          <a:stretch>
+            <a:fillRect/>
+          </a:stretch>
+        </p:blipFill>
+        <p:spPr>
+          <a:xfrm>
+            <a:off x="6355080" y="2400300"/>
+            <a:ext cx="5486400" cy="3429000"/>
+          </a:xfrm>
+          <a:prstGeom prst="rect">
+            <a:avLst/>
+          </a:prstGeom>
+        </p:spPr>
+      </p:pic>
+    </p:spTree>
+  </p:cSld>
+  <p:clrMapOvr>
+    <a:masterClrMapping/>
+  </p:clrMapOvr>
+</p:sld>
+</file>
+
+<file path=ppt/slides/slide41.xml><?xml version="1.0" encoding="utf-8"?>
+<p:sld xmlns:a="http://schemas.openxmlformats.org/drawingml/2006/main" xmlns:p="http://schemas.openxmlformats.org/presentationml/2006/main" xmlns:r="http://schemas.openxmlformats.org/officeDocument/2006/relationships">
+  <p:cSld>
+    <p:bg>
+      <p:bgPr>
+        <a:solidFill>
+          <a:srgbClr val="FFFFFF"/>
+        </a:solidFill>
+        <a:effectLst/>
+      </p:bgPr>
+    </p:bg>
+    <p:spTree>
+      <p:nvGrpSpPr>
+        <p:cNvPr id="1" name=""/>
+        <p:cNvGrpSpPr/>
+        <p:nvPr/>
+      </p:nvGrpSpPr>
+      <p:grpSpPr/>
+      <p:sp>
+        <p:nvSpPr>
+          <p:cNvPr id="2" name="Rectangle 1"/>
+          <p:cNvSpPr/>
+          <p:nvPr/>
+        </p:nvSpPr>
+        <p:spPr>
+          <a:xfrm>
+            <a:off x="0" y="0"/>
+            <a:ext cx="12191695" cy="566928"/>
+          </a:xfrm>
+          <a:prstGeom prst="rect">
+            <a:avLst/>
+          </a:prstGeom>
+          <a:solidFill>
+            <a:srgbClr val="7C3AED"/>
+          </a:solidFill>
+          <a:ln>
+            <a:noFill/>
+          </a:ln>
+          <a:effectLst/>
+        </p:spPr>
+        <p:style>
+          <a:lnRef idx="1">
+            <a:schemeClr val="accent1"/>
+          </a:lnRef>
+          <a:fillRef idx="3">
+            <a:schemeClr val="accent1"/>
+          </a:fillRef>
+          <a:effectRef idx="2">
+            <a:schemeClr val="accent1"/>
+          </a:effectRef>
+          <a:fontRef idx="minor">
+            <a:schemeClr val="lt1"/>
+          </a:fontRef>
+        </p:style>
+        <p:txBody>
+          <a:bodyPr rtlCol="0" anchor="ctr"/>
+          <a:lstStyle/>
+          <a:p>
+            <a:pPr algn="ctr"/>
+          </a:p>
+        </p:txBody>
+      </p:sp>
+      <p:sp>
+        <p:nvSpPr>
+          <p:cNvPr id="3" name="Rectangle 2"/>
+          <p:cNvSpPr/>
+          <p:nvPr/>
+        </p:nvSpPr>
+        <p:spPr>
+          <a:xfrm>
+            <a:off x="0" y="566928"/>
+            <a:ext cx="12191695" cy="54864"/>
+          </a:xfrm>
+          <a:prstGeom prst="rect">
+            <a:avLst/>
+          </a:prstGeom>
+          <a:solidFill>
+            <a:srgbClr val="FF9F1C"/>
+          </a:solidFill>
+          <a:ln>
+            <a:noFill/>
+          </a:ln>
+          <a:effectLst/>
+        </p:spPr>
+        <p:style>
+          <a:lnRef idx="1">
+            <a:schemeClr val="accent1"/>
+          </a:lnRef>
+          <a:fillRef idx="3">
+            <a:schemeClr val="accent1"/>
+          </a:fillRef>
+          <a:effectRef idx="2">
+            <a:schemeClr val="accent1"/>
+          </a:effectRef>
+          <a:fontRef idx="minor">
+            <a:schemeClr val="lt1"/>
+          </a:fontRef>
+        </p:style>
+        <p:txBody>
+          <a:bodyPr rtlCol="0" anchor="ctr"/>
+          <a:lstStyle/>
+          <a:p>
+            <a:pPr algn="ctr"/>
+          </a:p>
+        </p:txBody>
+      </p:sp>
+      <p:sp>
+        <p:nvSpPr>
+          <p:cNvPr id="4" name="TextBox 3"/>
+          <p:cNvSpPr txBox="1"/>
+          <p:nvPr/>
+        </p:nvSpPr>
+        <p:spPr>
+          <a:xfrm>
+            <a:off x="365760" y="27432"/>
+            <a:ext cx="7315200" cy="502920"/>
+          </a:xfrm>
+          <a:prstGeom prst="rect">
+            <a:avLst/>
+          </a:prstGeom>
+          <a:noFill/>
+        </p:spPr>
+        <p:txBody>
+          <a:bodyPr wrap="square" anchor="ctr">
+            <a:spAutoFit/>
+          </a:bodyPr>
+          <a:lstStyle/>
+          <a:p>
+            <a:pPr algn="l">
+              <a:lnSpc>
+                <a:spcPct val="100000"/>
+              </a:lnSpc>
+            </a:pPr>
+            <a:r>
+              <a:rPr sz="1500" b="1">
+                <a:solidFill>
+                  <a:srgbClr val="FFFFFF"/>
+                </a:solidFill>
+                <a:latin typeface="Malgun Gothic"/>
+              </a:rPr>
+              <a:t>🎒 망고아이 학생용 사용설명서</a:t>
+            </a:r>
+          </a:p>
+        </p:txBody>
+      </p:sp>
+      <p:sp>
+        <p:nvSpPr>
+          <p:cNvPr id="5" name="TextBox 4"/>
+          <p:cNvSpPr txBox="1"/>
+          <p:nvPr/>
+        </p:nvSpPr>
+        <p:spPr>
+          <a:xfrm>
+            <a:off x="8168335" y="27432"/>
+            <a:ext cx="3657600" cy="502920"/>
+          </a:xfrm>
+          <a:prstGeom prst="rect">
+            <a:avLst/>
+          </a:prstGeom>
+          <a:noFill/>
+        </p:spPr>
+        <p:txBody>
+          <a:bodyPr wrap="square" anchor="ctr">
+            <a:spAutoFit/>
+          </a:bodyPr>
+          <a:lstStyle/>
+          <a:p>
+            <a:pPr algn="r">
+              <a:lnSpc>
+                <a:spcPct val="100000"/>
+              </a:lnSpc>
+            </a:pPr>
+            <a:r>
+              <a:rPr sz="1300" b="1">
+                <a:solidFill>
+                  <a:srgbClr val="F1F5F9"/>
+                </a:solidFill>
+                <a:latin typeface="Malgun Gothic"/>
+              </a:rPr>
+              <a:t>주요 기능 사용법</a:t>
+            </a:r>
+          </a:p>
+        </p:txBody>
+      </p:sp>
+      <p:sp>
+        <p:nvSpPr>
+          <p:cNvPr id="6" name="Rounded Rectangle 5"/>
+          <p:cNvSpPr/>
+          <p:nvPr/>
+        </p:nvSpPr>
+        <p:spPr>
+          <a:xfrm>
+            <a:off x="365760" y="822960"/>
+            <a:ext cx="868680" cy="868680"/>
+          </a:xfrm>
+          <a:prstGeom prst="roundRect">
+            <a:avLst/>
+          </a:prstGeom>
+          <a:solidFill>
+            <a:srgbClr val="7C3AED"/>
+          </a:solidFill>
+          <a:ln>
+            <a:noFill/>
+          </a:ln>
+          <a:effectLst/>
+        </p:spPr>
+        <p:style>
+          <a:lnRef idx="1">
+            <a:schemeClr val="accent1"/>
+          </a:lnRef>
+          <a:fillRef idx="3">
+            <a:schemeClr val="accent1"/>
+          </a:fillRef>
+          <a:effectRef idx="2">
+            <a:schemeClr val="accent1"/>
+          </a:effectRef>
+          <a:fontRef idx="minor">
+            <a:schemeClr val="lt1"/>
+          </a:fontRef>
+        </p:style>
+        <p:txBody>
+          <a:bodyPr rtlCol="0" anchor="ctr"/>
+          <a:lstStyle/>
+          <a:p>
+            <a:pPr algn="ctr"/>
+          </a:p>
+        </p:txBody>
+      </p:sp>
+      <p:sp>
+        <p:nvSpPr>
+          <p:cNvPr id="7" name="TextBox 6"/>
+          <p:cNvSpPr txBox="1"/>
+          <p:nvPr/>
+        </p:nvSpPr>
+        <p:spPr>
+          <a:xfrm>
+            <a:off x="365760" y="822960"/>
+            <a:ext cx="868680" cy="868680"/>
+          </a:xfrm>
+          <a:prstGeom prst="rect">
+            <a:avLst/>
+          </a:prstGeom>
+          <a:noFill/>
+        </p:spPr>
+        <p:txBody>
+          <a:bodyPr wrap="square" anchor="ctr">
+            <a:spAutoFit/>
+          </a:bodyPr>
+          <a:lstStyle/>
+          <a:p>
+            <a:pPr algn="ctr">
+              <a:lnSpc>
+                <a:spcPct val="100000"/>
+              </a:lnSpc>
+            </a:pPr>
+            <a:r>
+              <a:rPr sz="2600" b="1">
+                <a:solidFill>
+                  <a:srgbClr val="FFFFFF"/>
+                </a:solidFill>
+                <a:latin typeface="Malgun Gothic"/>
+              </a:rPr>
+              <a:t>39</a:t>
+            </a:r>
+          </a:p>
+        </p:txBody>
+      </p:sp>
+      <p:sp>
+        <p:nvSpPr>
+          <p:cNvPr id="8" name="TextBox 7"/>
+          <p:cNvSpPr txBox="1"/>
+          <p:nvPr/>
+        </p:nvSpPr>
+        <p:spPr>
+          <a:xfrm>
+            <a:off x="1371600" y="822960"/>
+            <a:ext cx="10424160" cy="502920"/>
+          </a:xfrm>
+          <a:prstGeom prst="rect">
+            <a:avLst/>
+          </a:prstGeom>
+          <a:noFill/>
+        </p:spPr>
+        <p:txBody>
+          <a:bodyPr wrap="square" anchor="t">
+            <a:spAutoFit/>
+          </a:bodyPr>
+          <a:lstStyle/>
+          <a:p>
+            <a:pPr algn="l">
+              <a:lnSpc>
+                <a:spcPct val="100000"/>
+              </a:lnSpc>
+            </a:pPr>
+            <a:r>
+              <a:rPr sz="2300" b="1">
+                <a:solidFill>
+                  <a:srgbClr val="1E2340"/>
+                </a:solidFill>
+                <a:latin typeface="Malgun Gothic"/>
+              </a:rPr>
+              <a:t>🚀 다음은 어디로? (학습 흐름 안내)</a:t>
+            </a:r>
+          </a:p>
+        </p:txBody>
+      </p:sp>
+      <p:sp>
+        <p:nvSpPr>
+          <p:cNvPr id="9" name="TextBox 8"/>
+          <p:cNvSpPr txBox="1"/>
+          <p:nvPr/>
+        </p:nvSpPr>
+        <p:spPr>
+          <a:xfrm>
+            <a:off x="1417320" y="1353312"/>
+            <a:ext cx="10424160" cy="320040"/>
+          </a:xfrm>
+          <a:prstGeom prst="rect">
+            <a:avLst/>
+          </a:prstGeom>
+          <a:noFill/>
+        </p:spPr>
+        <p:txBody>
+          <a:bodyPr wrap="square" anchor="t">
+            <a:spAutoFit/>
+          </a:bodyPr>
+          <a:lstStyle/>
+          <a:p>
+            <a:pPr algn="l">
+              <a:lnSpc>
+                <a:spcPct val="100000"/>
+              </a:lnSpc>
+            </a:pPr>
+            <a:r>
+              <a:rPr sz="1300" b="0">
+                <a:solidFill>
+                  <a:srgbClr val="64748B"/>
+                </a:solidFill>
+                <a:latin typeface="Malgun Gothic"/>
+              </a:rPr>
+              <a:t>한 활동이 끝나면 다음 활동을 바로 추천</a:t>
+            </a:r>
+          </a:p>
+        </p:txBody>
+      </p:sp>
+      <p:sp>
+        <p:nvSpPr>
+          <p:cNvPr id="10" name="Rounded Rectangle 9"/>
+          <p:cNvSpPr/>
+          <p:nvPr/>
+        </p:nvSpPr>
+        <p:spPr>
+          <a:xfrm>
+            <a:off x="365760" y="1828800"/>
+            <a:ext cx="11430000" cy="777240"/>
+          </a:xfrm>
+          <a:prstGeom prst="roundRect">
+            <a:avLst/>
+          </a:prstGeom>
+          <a:solidFill>
+            <a:srgbClr val="F3F0FF"/>
+          </a:solidFill>
+          <a:ln>
+            <a:noFill/>
+          </a:ln>
+          <a:effectLst/>
+        </p:spPr>
+        <p:style>
+          <a:lnRef idx="1">
+            <a:schemeClr val="accent1"/>
+          </a:lnRef>
+          <a:fillRef idx="3">
+            <a:schemeClr val="accent1"/>
+          </a:fillRef>
+          <a:effectRef idx="2">
+            <a:schemeClr val="accent1"/>
+          </a:effectRef>
+          <a:fontRef idx="minor">
+            <a:schemeClr val="lt1"/>
+          </a:fontRef>
+        </p:style>
+        <p:txBody>
+          <a:bodyPr rtlCol="0" anchor="ctr"/>
+          <a:lstStyle/>
+          <a:p>
+            <a:pPr algn="ctr"/>
+          </a:p>
+        </p:txBody>
+      </p:sp>
+      <p:sp>
+        <p:nvSpPr>
+          <p:cNvPr id="11" name="TextBox 10"/>
+          <p:cNvSpPr txBox="1"/>
+          <p:nvPr/>
+        </p:nvSpPr>
+        <p:spPr>
+          <a:xfrm>
+            <a:off x="548640" y="1901952"/>
+            <a:ext cx="11064240" cy="640080"/>
+          </a:xfrm>
+          <a:prstGeom prst="rect">
+            <a:avLst/>
+          </a:prstGeom>
+          <a:noFill/>
+        </p:spPr>
+        <p:txBody>
+          <a:bodyPr wrap="square" anchor="t">
+            <a:spAutoFit/>
+          </a:bodyPr>
+          <a:lstStyle/>
+          <a:p>
+            <a:pPr algn="l">
+              <a:lnSpc>
+                <a:spcPct val="115000"/>
+              </a:lnSpc>
+            </a:pPr>
+            <a:r>
+              <a:rPr sz="1200" b="0">
+                <a:solidFill>
+                  <a:srgbClr val="334155"/>
+                </a:solidFill>
+                <a:latin typeface="Malgun Gothic"/>
+              </a:rPr>
+              <a:t>웜업·게임·수업·복습·발음 등 한 가지 활동을 마치면, 화면에 ‘🚀 다음은 어디로 이동할까요?’ 메뉴가 떠요. 메뉴를 다시 찾아 헤맬 필요 없이, 추천 표시(⭐) 를 따라 자연스럽게 다음 활동으로 이어갈 수 있어요.</a:t>
+            </a:r>
+          </a:p>
+        </p:txBody>
+      </p:sp>
+      <p:sp>
+        <p:nvSpPr>
+          <p:cNvPr id="12" name="TextBox 11"/>
+          <p:cNvSpPr txBox="1"/>
+          <p:nvPr/>
+        </p:nvSpPr>
+        <p:spPr>
+          <a:xfrm>
+            <a:off x="457200" y="2743200"/>
+            <a:ext cx="5669280" cy="320040"/>
+          </a:xfrm>
+          <a:prstGeom prst="rect">
+            <a:avLst/>
+          </a:prstGeom>
+          <a:noFill/>
+        </p:spPr>
+        <p:txBody>
+          <a:bodyPr wrap="square" anchor="t">
+            <a:spAutoFit/>
+          </a:bodyPr>
+          <a:lstStyle/>
+          <a:p>
+            <a:pPr algn="l">
+              <a:lnSpc>
+                <a:spcPct val="100000"/>
+              </a:lnSpc>
+            </a:pPr>
+            <a:r>
+              <a:rPr sz="1350" b="1">
+                <a:solidFill>
+                  <a:srgbClr val="7C3AED"/>
+                </a:solidFill>
+                <a:latin typeface="Malgun Gothic"/>
+              </a:rPr>
+              <a:t>사용 방법</a:t>
+            </a:r>
+          </a:p>
+        </p:txBody>
+      </p:sp>
+      <p:sp>
+        <p:nvSpPr>
+          <p:cNvPr id="13" name="TextBox 12"/>
+          <p:cNvSpPr txBox="1"/>
+          <p:nvPr/>
+        </p:nvSpPr>
+        <p:spPr>
+          <a:xfrm>
+            <a:off x="457200" y="3108960"/>
+            <a:ext cx="5669280" cy="2377440"/>
+          </a:xfrm>
+          <a:prstGeom prst="rect">
+            <a:avLst/>
+          </a:prstGeom>
+          <a:noFill/>
+        </p:spPr>
+        <p:txBody>
+          <a:bodyPr wrap="square">
+            <a:spAutoFit/>
+          </a:bodyPr>
+          <a:lstStyle/>
+          <a:p>
+            <a:pPr>
+              <a:lnSpc>
+                <a:spcPct val="115000"/>
+              </a:lnSpc>
+              <a:spcAft>
+                <a:spcPts val="600"/>
+              </a:spcAft>
+            </a:pPr>
+            <a:r>
+              <a:rPr sz="1050" b="1">
+                <a:solidFill>
+                  <a:srgbClr val="7C3AED"/>
+                </a:solidFill>
+                <a:latin typeface="Malgun Gothic"/>
+              </a:rPr>
+              <a:t>● </a:t>
+            </a:r>
+            <a:r>
+              <a:rPr sz="1250">
+                <a:solidFill>
+                  <a:srgbClr val="334155"/>
+                </a:solidFill>
+                <a:latin typeface="Malgun Gothic"/>
+              </a:rPr>
+              <a:t>웜업·학생게임·복습퀴즈·수업·단계별 발음 등을 끝까지 완료해요.</a:t>
+            </a:r>
+          </a:p>
+          <a:p>
+            <a:pPr>
+              <a:lnSpc>
+                <a:spcPct val="115000"/>
+              </a:lnSpc>
+              <a:spcAft>
+                <a:spcPts val="600"/>
+              </a:spcAft>
+            </a:pPr>
+            <a:r>
+              <a:rPr sz="1050" b="1">
+                <a:solidFill>
+                  <a:srgbClr val="7C3AED"/>
+                </a:solidFill>
+                <a:latin typeface="Malgun Gothic"/>
+              </a:rPr>
+              <a:t>● </a:t>
+            </a:r>
+            <a:r>
+              <a:rPr sz="1250">
+                <a:solidFill>
+                  <a:srgbClr val="334155"/>
+                </a:solidFill>
+                <a:latin typeface="Malgun Gothic"/>
+              </a:rPr>
+              <a:t>완료 화면의 ‘🚀 다음 활동 고르기’ 버튼(또는 자동으로 뜨는 메뉴)을 확인해요.</a:t>
+            </a:r>
+          </a:p>
+          <a:p>
+            <a:pPr>
+              <a:lnSpc>
+                <a:spcPct val="115000"/>
+              </a:lnSpc>
+              <a:spcAft>
+                <a:spcPts val="600"/>
+              </a:spcAft>
+            </a:pPr>
+            <a:r>
+              <a:rPr sz="1050" b="1">
+                <a:solidFill>
+                  <a:srgbClr val="7C3AED"/>
+                </a:solidFill>
+                <a:latin typeface="Malgun Gothic"/>
+              </a:rPr>
+              <a:t>● </a:t>
+            </a:r>
+            <a:r>
+              <a:rPr sz="1250">
+                <a:solidFill>
+                  <a:srgbClr val="334155"/>
+                </a:solidFill>
+                <a:latin typeface="Malgun Gothic"/>
+              </a:rPr>
+              <a:t>메뉴에서 수업 입장·AI 웜업·복습퀴즈·학생게임·녹화 다시보기·단계별 발음 등을 골라요.</a:t>
+            </a:r>
+          </a:p>
+          <a:p>
+            <a:pPr>
+              <a:lnSpc>
+                <a:spcPct val="115000"/>
+              </a:lnSpc>
+              <a:spcAft>
+                <a:spcPts val="600"/>
+              </a:spcAft>
+            </a:pPr>
+            <a:r>
+              <a:rPr sz="1050" b="1">
+                <a:solidFill>
+                  <a:srgbClr val="7C3AED"/>
+                </a:solidFill>
+                <a:latin typeface="Malgun Gothic"/>
+              </a:rPr>
+              <a:t>● </a:t>
+            </a:r>
+            <a:r>
+              <a:rPr sz="1250">
+                <a:solidFill>
+                  <a:srgbClr val="334155"/>
+                </a:solidFill>
+                <a:latin typeface="Malgun Gothic"/>
+              </a:rPr>
+              <a:t>추천(⭐) 이 붙은 항목은 지금 하기 좋은 다음 활동이에요.</a:t>
+            </a:r>
+          </a:p>
+        </p:txBody>
+      </p:sp>
+      <p:sp>
+        <p:nvSpPr>
+          <p:cNvPr id="14" name="Rounded Rectangle 13"/>
+          <p:cNvSpPr/>
+          <p:nvPr/>
+        </p:nvSpPr>
+        <p:spPr>
+          <a:xfrm>
+            <a:off x="457200" y="4782312"/>
+            <a:ext cx="5669280" cy="1316736"/>
+          </a:xfrm>
+          <a:prstGeom prst="roundRect">
+            <a:avLst/>
+          </a:prstGeom>
+          <a:solidFill>
+            <a:srgbClr val="F4F7FF"/>
+          </a:solidFill>
+          <a:ln w="12700">
+            <a:solidFill>
+              <a:srgbClr val="7C3AED"/>
+            </a:solidFill>
+          </a:ln>
+          <a:effectLst/>
+        </p:spPr>
+        <p:style>
+          <a:lnRef idx="1">
+            <a:schemeClr val="accent1"/>
+          </a:lnRef>
+          <a:fillRef idx="3">
+            <a:schemeClr val="accent1"/>
+          </a:fillRef>
+          <a:effectRef idx="2">
+            <a:schemeClr val="accent1"/>
+          </a:effectRef>
+          <a:fontRef idx="minor">
+            <a:schemeClr val="lt1"/>
+          </a:fontRef>
+        </p:style>
+        <p:txBody>
+          <a:bodyPr rtlCol="0" anchor="ctr"/>
+          <a:lstStyle/>
+          <a:p>
+            <a:pPr algn="ctr"/>
+          </a:p>
+        </p:txBody>
+      </p:sp>
+      <p:sp>
+        <p:nvSpPr>
+          <p:cNvPr id="15" name="TextBox 14"/>
+          <p:cNvSpPr txBox="1"/>
+          <p:nvPr/>
+        </p:nvSpPr>
+        <p:spPr>
+          <a:xfrm>
+            <a:off x="594360" y="4837175"/>
+            <a:ext cx="5394960" cy="274320"/>
+          </a:xfrm>
+          <a:prstGeom prst="rect">
+            <a:avLst/>
+          </a:prstGeom>
+          <a:noFill/>
+        </p:spPr>
+        <p:txBody>
+          <a:bodyPr wrap="square" anchor="t">
+            <a:spAutoFit/>
+          </a:bodyPr>
+          <a:lstStyle/>
+          <a:p>
+            <a:pPr algn="l">
+              <a:lnSpc>
+                <a:spcPct val="100000"/>
+              </a:lnSpc>
+            </a:pPr>
+            <a:r>
+              <a:rPr sz="1150" b="1">
+                <a:solidFill>
+                  <a:srgbClr val="7C3AED"/>
+                </a:solidFill>
+                <a:latin typeface="Malgun Gothic"/>
+              </a:rPr>
+              <a:t>✅ 핵심 포인트</a:t>
+            </a:r>
+          </a:p>
+        </p:txBody>
+      </p:sp>
+      <p:sp>
+        <p:nvSpPr>
+          <p:cNvPr id="16" name="TextBox 15"/>
+          <p:cNvSpPr txBox="1"/>
+          <p:nvPr/>
+        </p:nvSpPr>
+        <p:spPr>
+          <a:xfrm>
+            <a:off x="594360" y="5111496"/>
+            <a:ext cx="5394960" cy="950976"/>
+          </a:xfrm>
+          <a:prstGeom prst="rect">
+            <a:avLst/>
+          </a:prstGeom>
+          <a:noFill/>
+        </p:spPr>
+        <p:txBody>
+          <a:bodyPr wrap="square">
+            <a:spAutoFit/>
+          </a:bodyPr>
+          <a:lstStyle/>
+          <a:p>
+            <a:pPr>
+              <a:lnSpc>
+                <a:spcPct val="115000"/>
+              </a:lnSpc>
+              <a:spcAft>
+                <a:spcPts val="200"/>
+              </a:spcAft>
+            </a:pPr>
+            <a:r>
+              <a:rPr sz="900" b="1">
+                <a:solidFill>
+                  <a:srgbClr val="7C3AED"/>
+                </a:solidFill>
+                <a:latin typeface="Malgun Gothic"/>
+              </a:rPr>
+              <a:t>● </a:t>
+            </a:r>
+            <a:r>
+              <a:rPr sz="1100">
+                <a:solidFill>
+                  <a:srgbClr val="334155"/>
+                </a:solidFill>
+                <a:latin typeface="Malgun Gothic"/>
+              </a:rPr>
+              <a:t>추천 흐름: 웜업 → 게임 → 수업 → 복습 → 발음 → 게임 처럼 자연스럽게 이어져요.</a:t>
+            </a:r>
+          </a:p>
+          <a:p>
+            <a:pPr>
+              <a:lnSpc>
+                <a:spcPct val="115000"/>
+              </a:lnSpc>
+              <a:spcAft>
+                <a:spcPts val="200"/>
+              </a:spcAft>
+            </a:pPr>
+            <a:r>
+              <a:rPr sz="900" b="1">
+                <a:solidFill>
+                  <a:srgbClr val="7C3AED"/>
+                </a:solidFill>
+                <a:latin typeface="Malgun Gothic"/>
+              </a:rPr>
+              <a:t>● </a:t>
+            </a:r>
+            <a:r>
+              <a:rPr sz="1100">
+                <a:solidFill>
+                  <a:srgbClr val="334155"/>
+                </a:solidFill>
+                <a:latin typeface="Malgun Gothic"/>
+              </a:rPr>
+              <a:t>‘녹화 다시보기’ 를 고르면 직전 수업 영상을 바로 다시 볼 수 있어요.</a:t>
+            </a:r>
+          </a:p>
+          <a:p>
+            <a:pPr>
+              <a:lnSpc>
+                <a:spcPct val="115000"/>
+              </a:lnSpc>
+              <a:spcAft>
+                <a:spcPts val="200"/>
+              </a:spcAft>
+            </a:pPr>
+            <a:r>
+              <a:rPr sz="900" b="1">
+                <a:solidFill>
+                  <a:srgbClr val="7C3AED"/>
+                </a:solidFill>
+                <a:latin typeface="Malgun Gothic"/>
+              </a:rPr>
+              <a:t>● </a:t>
+            </a:r>
+            <a:r>
+              <a:rPr sz="1100">
+                <a:solidFill>
+                  <a:srgbClr val="334155"/>
+                </a:solidFill>
+                <a:latin typeface="Malgun Gothic"/>
+              </a:rPr>
+              <a:t>게임·퀴즈를 안 해도 목록 화면의 ‘🚀 다음으로 이동’ 버튼으로 메뉴를 열 수 있어요.</a:t>
+            </a:r>
+          </a:p>
+        </p:txBody>
+      </p:sp>
+      <p:sp>
+        <p:nvSpPr>
+          <p:cNvPr id="17" name="Rounded Rectangle 16"/>
+          <p:cNvSpPr/>
+          <p:nvPr/>
+        </p:nvSpPr>
+        <p:spPr>
+          <a:xfrm>
+            <a:off x="457200" y="6208775"/>
+            <a:ext cx="5669280" cy="658368"/>
+          </a:xfrm>
+          <a:prstGeom prst="roundRect">
+            <a:avLst/>
+          </a:prstGeom>
+          <a:solidFill>
+            <a:srgbClr val="FFF7E6"/>
+          </a:solidFill>
+          <a:ln w="12700">
+            <a:solidFill>
+              <a:srgbClr val="FF9F1C"/>
+            </a:solidFill>
+          </a:ln>
+          <a:effectLst/>
+        </p:spPr>
+        <p:style>
+          <a:lnRef idx="1">
+            <a:schemeClr val="accent1"/>
+          </a:lnRef>
+          <a:fillRef idx="3">
+            <a:schemeClr val="accent1"/>
+          </a:fillRef>
+          <a:effectRef idx="2">
+            <a:schemeClr val="accent1"/>
+          </a:effectRef>
+          <a:fontRef idx="minor">
+            <a:schemeClr val="lt1"/>
+          </a:fontRef>
+        </p:style>
+        <p:txBody>
+          <a:bodyPr rtlCol="0" anchor="ctr"/>
+          <a:lstStyle/>
+          <a:p>
+            <a:pPr algn="ctr"/>
+          </a:p>
+        </p:txBody>
+      </p:sp>
+      <p:sp>
+        <p:nvSpPr>
+          <p:cNvPr id="18" name="TextBox 17"/>
+          <p:cNvSpPr txBox="1"/>
+          <p:nvPr/>
+        </p:nvSpPr>
+        <p:spPr>
+          <a:xfrm>
+            <a:off x="594360" y="6254495"/>
+            <a:ext cx="5394960" cy="566928"/>
+          </a:xfrm>
+          <a:prstGeom prst="rect">
+            <a:avLst/>
+          </a:prstGeom>
+          <a:noFill/>
+        </p:spPr>
+        <p:txBody>
+          <a:bodyPr wrap="square" anchor="t">
+            <a:spAutoFit/>
+          </a:bodyPr>
+          <a:lstStyle/>
+          <a:p>
+            <a:pPr algn="l">
+              <a:lnSpc>
+                <a:spcPct val="105000"/>
+              </a:lnSpc>
+            </a:pPr>
+            <a:r>
+              <a:rPr sz="1050" b="0">
+                <a:solidFill>
+                  <a:srgbClr val="5B4A2A"/>
+                </a:solidFill>
+                <a:latin typeface="Malgun Gothic"/>
+              </a:rPr>
+              <a:t>💡 꿀팁 · 무엇을 할지 고민될 때 이 메뉴를 켜면, 오늘 공부를 매끄럽게 이어갈 수 있어요.</a:t>
+            </a:r>
+          </a:p>
+        </p:txBody>
+      </p:sp>
+      <p:sp>
+        <p:nvSpPr>
+          <p:cNvPr id="19" name="Rectangle 18"/>
+          <p:cNvSpPr/>
+          <p:nvPr/>
+        </p:nvSpPr>
+        <p:spPr>
+          <a:xfrm>
+            <a:off x="6300216" y="2345436"/>
+            <a:ext cx="5596128" cy="3538728"/>
+          </a:xfrm>
+          <a:prstGeom prst="rect">
+            <a:avLst/>
+          </a:prstGeom>
+          <a:solidFill>
+            <a:srgbClr val="FFFFFF"/>
+          </a:solidFill>
+          <a:ln w="12700">
+            <a:solidFill>
+              <a:srgbClr val="E2E8F0"/>
+            </a:solidFill>
+          </a:ln>
+          <a:effectLst/>
+        </p:spPr>
+        <p:style>
+          <a:lnRef idx="1">
+            <a:schemeClr val="accent1"/>
+          </a:lnRef>
+          <a:fillRef idx="3">
+            <a:schemeClr val="accent1"/>
+          </a:fillRef>
+          <a:effectRef idx="2">
+            <a:schemeClr val="accent1"/>
+          </a:effectRef>
+          <a:fontRef idx="minor">
+            <a:schemeClr val="lt1"/>
+          </a:fontRef>
+        </p:style>
+        <p:txBody>
+          <a:bodyPr rtlCol="0" anchor="ctr"/>
+          <a:lstStyle/>
+          <a:p>
+            <a:pPr algn="ctr"/>
+          </a:p>
+        </p:txBody>
+      </p:sp>
+      <p:pic>
+        <p:nvPicPr>
+          <p:cNvPr id="20" name="Picture 19" descr="student_flow.jpg"/>
+          <p:cNvPicPr>
+            <a:picLocks noChangeAspect="1"/>
+          </p:cNvPicPr>
+          <p:nvPr/>
+        </p:nvPicPr>
+        <p:blipFill>
+          <a:blip r:embed="rId2"/>
+          <a:stretch>
+            <a:fillRect/>
+          </a:stretch>
+        </p:blipFill>
+        <p:spPr>
+          <a:xfrm>
+            <a:off x="6355080" y="2400300"/>
+            <a:ext cx="5486400" cy="3429000"/>
+          </a:xfrm>
+          <a:prstGeom prst="rect">
+            <a:avLst/>
+          </a:prstGeom>
+        </p:spPr>
+      </p:pic>
+    </p:spTree>
+  </p:cSld>
+  <p:clrMapOvr>
+    <a:masterClrMapping/>
+  </p:clrMapOvr>
+</p:sld>
+</file>
+
+<file path=ppt/slides/slide42.xml><?xml version="1.0" encoding="utf-8"?>
+<p:sld xmlns:a="http://schemas.openxmlformats.org/drawingml/2006/main" xmlns:p="http://schemas.openxmlformats.org/presentationml/2006/main" xmlns:r="http://schemas.openxmlformats.org/officeDocument/2006/relationships">
+  <p:cSld>
+    <p:bg>
+      <p:bgPr>
+        <a:solidFill>
+          <a:srgbClr val="FFFFFF"/>
+        </a:solidFill>
+        <a:effectLst/>
+      </p:bgPr>
+    </p:bg>
+    <p:spTree>
+      <p:nvGrpSpPr>
+        <p:cNvPr id="1" name=""/>
+        <p:cNvGrpSpPr/>
+        <p:nvPr/>
+      </p:nvGrpSpPr>
+      <p:grpSpPr/>
+      <p:sp>
+        <p:nvSpPr>
+          <p:cNvPr id="2" name="Rectangle 1"/>
+          <p:cNvSpPr/>
+          <p:nvPr/>
+        </p:nvSpPr>
+        <p:spPr>
+          <a:xfrm>
+            <a:off x="0" y="0"/>
+            <a:ext cx="12191695" cy="566928"/>
+          </a:xfrm>
+          <a:prstGeom prst="rect">
+            <a:avLst/>
+          </a:prstGeom>
+          <a:solidFill>
+            <a:srgbClr val="7C3AED"/>
+          </a:solidFill>
+          <a:ln>
+            <a:noFill/>
+          </a:ln>
+          <a:effectLst/>
+        </p:spPr>
+        <p:style>
+          <a:lnRef idx="1">
+            <a:schemeClr val="accent1"/>
+          </a:lnRef>
+          <a:fillRef idx="3">
+            <a:schemeClr val="accent1"/>
+          </a:fillRef>
+          <a:effectRef idx="2">
+            <a:schemeClr val="accent1"/>
+          </a:effectRef>
+          <a:fontRef idx="minor">
+            <a:schemeClr val="lt1"/>
+          </a:fontRef>
+        </p:style>
+        <p:txBody>
+          <a:bodyPr rtlCol="0" anchor="ctr"/>
+          <a:lstStyle/>
+          <a:p>
+            <a:pPr algn="ctr"/>
+          </a:p>
+        </p:txBody>
+      </p:sp>
+      <p:sp>
+        <p:nvSpPr>
+          <p:cNvPr id="3" name="Rectangle 2"/>
+          <p:cNvSpPr/>
+          <p:nvPr/>
+        </p:nvSpPr>
+        <p:spPr>
+          <a:xfrm>
+            <a:off x="0" y="566928"/>
+            <a:ext cx="12191695" cy="54864"/>
+          </a:xfrm>
+          <a:prstGeom prst="rect">
+            <a:avLst/>
+          </a:prstGeom>
+          <a:solidFill>
+            <a:srgbClr val="FF9F1C"/>
+          </a:solidFill>
+          <a:ln>
+            <a:noFill/>
+          </a:ln>
+          <a:effectLst/>
+        </p:spPr>
+        <p:style>
+          <a:lnRef idx="1">
+            <a:schemeClr val="accent1"/>
+          </a:lnRef>
+          <a:fillRef idx="3">
+            <a:schemeClr val="accent1"/>
+          </a:fillRef>
+          <a:effectRef idx="2">
+            <a:schemeClr val="accent1"/>
+          </a:effectRef>
+          <a:fontRef idx="minor">
+            <a:schemeClr val="lt1"/>
+          </a:fontRef>
+        </p:style>
+        <p:txBody>
+          <a:bodyPr rtlCol="0" anchor="ctr"/>
+          <a:lstStyle/>
+          <a:p>
+            <a:pPr algn="ctr"/>
+          </a:p>
+        </p:txBody>
+      </p:sp>
+      <p:sp>
+        <p:nvSpPr>
+          <p:cNvPr id="4" name="TextBox 3"/>
+          <p:cNvSpPr txBox="1"/>
+          <p:nvPr/>
+        </p:nvSpPr>
+        <p:spPr>
+          <a:xfrm>
+            <a:off x="365760" y="27432"/>
+            <a:ext cx="7315200" cy="502920"/>
+          </a:xfrm>
+          <a:prstGeom prst="rect">
+            <a:avLst/>
+          </a:prstGeom>
+          <a:noFill/>
+        </p:spPr>
+        <p:txBody>
+          <a:bodyPr wrap="square" anchor="ctr">
+            <a:spAutoFit/>
+          </a:bodyPr>
+          <a:lstStyle/>
+          <a:p>
+            <a:pPr algn="l">
+              <a:lnSpc>
+                <a:spcPct val="100000"/>
+              </a:lnSpc>
+            </a:pPr>
+            <a:r>
+              <a:rPr sz="1500" b="1">
+                <a:solidFill>
+                  <a:srgbClr val="FFFFFF"/>
+                </a:solidFill>
+                <a:latin typeface="Malgun Gothic"/>
+              </a:rPr>
+              <a:t>🎒 망고아이 학생용 사용설명서</a:t>
+            </a:r>
+          </a:p>
+        </p:txBody>
+      </p:sp>
+      <p:sp>
+        <p:nvSpPr>
+          <p:cNvPr id="5" name="TextBox 4"/>
+          <p:cNvSpPr txBox="1"/>
+          <p:nvPr/>
+        </p:nvSpPr>
+        <p:spPr>
+          <a:xfrm>
+            <a:off x="8168335" y="27432"/>
+            <a:ext cx="3657600" cy="502920"/>
+          </a:xfrm>
+          <a:prstGeom prst="rect">
+            <a:avLst/>
+          </a:prstGeom>
+          <a:noFill/>
+        </p:spPr>
+        <p:txBody>
+          <a:bodyPr wrap="square" anchor="ctr">
+            <a:spAutoFit/>
+          </a:bodyPr>
+          <a:lstStyle/>
+          <a:p>
+            <a:pPr algn="r">
+              <a:lnSpc>
+                <a:spcPct val="100000"/>
+              </a:lnSpc>
+            </a:pPr>
+            <a:r>
+              <a:rPr sz="1300" b="1">
+                <a:solidFill>
+                  <a:srgbClr val="F1F5F9"/>
+                </a:solidFill>
+                <a:latin typeface="Malgun Gothic"/>
+              </a:rPr>
+              <a:t>주요 기능 사용법</a:t>
+            </a:r>
+          </a:p>
+        </p:txBody>
+      </p:sp>
+      <p:sp>
+        <p:nvSpPr>
+          <p:cNvPr id="6" name="Rounded Rectangle 5"/>
+          <p:cNvSpPr/>
+          <p:nvPr/>
+        </p:nvSpPr>
+        <p:spPr>
+          <a:xfrm>
+            <a:off x="365760" y="822960"/>
+            <a:ext cx="868680" cy="868680"/>
+          </a:xfrm>
+          <a:prstGeom prst="roundRect">
+            <a:avLst/>
+          </a:prstGeom>
+          <a:solidFill>
+            <a:srgbClr val="7C3AED"/>
+          </a:solidFill>
+          <a:ln>
+            <a:noFill/>
+          </a:ln>
+          <a:effectLst/>
+        </p:spPr>
+        <p:style>
+          <a:lnRef idx="1">
+            <a:schemeClr val="accent1"/>
+          </a:lnRef>
+          <a:fillRef idx="3">
+            <a:schemeClr val="accent1"/>
+          </a:fillRef>
+          <a:effectRef idx="2">
+            <a:schemeClr val="accent1"/>
+          </a:effectRef>
+          <a:fontRef idx="minor">
+            <a:schemeClr val="lt1"/>
+          </a:fontRef>
+        </p:style>
+        <p:txBody>
+          <a:bodyPr rtlCol="0" anchor="ctr"/>
+          <a:lstStyle/>
+          <a:p>
+            <a:pPr algn="ctr"/>
+          </a:p>
+        </p:txBody>
+      </p:sp>
+      <p:sp>
+        <p:nvSpPr>
+          <p:cNvPr id="7" name="TextBox 6"/>
+          <p:cNvSpPr txBox="1"/>
+          <p:nvPr/>
+        </p:nvSpPr>
+        <p:spPr>
+          <a:xfrm>
+            <a:off x="365760" y="822960"/>
+            <a:ext cx="868680" cy="868680"/>
+          </a:xfrm>
+          <a:prstGeom prst="rect">
+            <a:avLst/>
+          </a:prstGeom>
+          <a:noFill/>
+        </p:spPr>
+        <p:txBody>
+          <a:bodyPr wrap="square" anchor="ctr">
+            <a:spAutoFit/>
+          </a:bodyPr>
+          <a:lstStyle/>
+          <a:p>
+            <a:pPr algn="ctr">
+              <a:lnSpc>
+                <a:spcPct val="100000"/>
+              </a:lnSpc>
+            </a:pPr>
+            <a:r>
+              <a:rPr sz="2600" b="1">
+                <a:solidFill>
+                  <a:srgbClr val="FFFFFF"/>
+                </a:solidFill>
+                <a:latin typeface="Malgun Gothic"/>
+              </a:rPr>
+              <a:t>40</a:t>
+            </a:r>
+          </a:p>
+        </p:txBody>
+      </p:sp>
+      <p:sp>
+        <p:nvSpPr>
+          <p:cNvPr id="8" name="TextBox 7"/>
+          <p:cNvSpPr txBox="1"/>
+          <p:nvPr/>
+        </p:nvSpPr>
+        <p:spPr>
+          <a:xfrm>
+            <a:off x="1371600" y="822960"/>
+            <a:ext cx="10424160" cy="502920"/>
+          </a:xfrm>
+          <a:prstGeom prst="rect">
+            <a:avLst/>
+          </a:prstGeom>
+          <a:noFill/>
+        </p:spPr>
+        <p:txBody>
+          <a:bodyPr wrap="square" anchor="t">
+            <a:spAutoFit/>
+          </a:bodyPr>
+          <a:lstStyle/>
+          <a:p>
+            <a:pPr algn="l">
+              <a:lnSpc>
+                <a:spcPct val="100000"/>
+              </a:lnSpc>
+            </a:pPr>
+            <a:r>
+              <a:rPr sz="2300" b="1">
+                <a:solidFill>
+                  <a:srgbClr val="1E2340"/>
+                </a:solidFill>
+                <a:latin typeface="Malgun Gothic"/>
+              </a:rPr>
+              <a:t>🤖 A.i 상담사에게 물어보기</a:t>
+            </a:r>
+          </a:p>
+        </p:txBody>
+      </p:sp>
+      <p:sp>
+        <p:nvSpPr>
+          <p:cNvPr id="9" name="TextBox 8"/>
+          <p:cNvSpPr txBox="1"/>
+          <p:nvPr/>
+        </p:nvSpPr>
+        <p:spPr>
+          <a:xfrm>
+            <a:off x="1417320" y="1353312"/>
+            <a:ext cx="10424160" cy="320040"/>
+          </a:xfrm>
+          <a:prstGeom prst="rect">
+            <a:avLst/>
+          </a:prstGeom>
+          <a:noFill/>
+        </p:spPr>
+        <p:txBody>
+          <a:bodyPr wrap="square" anchor="t">
+            <a:spAutoFit/>
+          </a:bodyPr>
+          <a:lstStyle/>
+          <a:p>
+            <a:pPr algn="l">
+              <a:lnSpc>
+                <a:spcPct val="100000"/>
+              </a:lnSpc>
+            </a:pPr>
+            <a:r>
+              <a:rPr sz="1300" b="0">
+                <a:solidFill>
+                  <a:srgbClr val="64748B"/>
+                </a:solidFill>
+                <a:latin typeface="Malgun Gothic"/>
+              </a:rPr>
+              <a:t>화면 우하단 상담 아바타</a:t>
+            </a:r>
+          </a:p>
+        </p:txBody>
+      </p:sp>
+      <p:sp>
+        <p:nvSpPr>
+          <p:cNvPr id="10" name="Rounded Rectangle 9"/>
+          <p:cNvSpPr/>
+          <p:nvPr/>
+        </p:nvSpPr>
+        <p:spPr>
+          <a:xfrm>
+            <a:off x="365760" y="1828800"/>
+            <a:ext cx="11430000" cy="777240"/>
+          </a:xfrm>
+          <a:prstGeom prst="roundRect">
+            <a:avLst/>
+          </a:prstGeom>
+          <a:solidFill>
+            <a:srgbClr val="F3F0FF"/>
+          </a:solidFill>
+          <a:ln>
+            <a:noFill/>
+          </a:ln>
+          <a:effectLst/>
+        </p:spPr>
+        <p:style>
+          <a:lnRef idx="1">
+            <a:schemeClr val="accent1"/>
+          </a:lnRef>
+          <a:fillRef idx="3">
+            <a:schemeClr val="accent1"/>
+          </a:fillRef>
+          <a:effectRef idx="2">
+            <a:schemeClr val="accent1"/>
+          </a:effectRef>
+          <a:fontRef idx="minor">
+            <a:schemeClr val="lt1"/>
+          </a:fontRef>
+        </p:style>
+        <p:txBody>
+          <a:bodyPr rtlCol="0" anchor="ctr"/>
+          <a:lstStyle/>
+          <a:p>
+            <a:pPr algn="ctr"/>
+          </a:p>
+        </p:txBody>
+      </p:sp>
+      <p:sp>
+        <p:nvSpPr>
+          <p:cNvPr id="11" name="TextBox 10"/>
+          <p:cNvSpPr txBox="1"/>
+          <p:nvPr/>
+        </p:nvSpPr>
+        <p:spPr>
+          <a:xfrm>
+            <a:off x="548640" y="1901952"/>
+            <a:ext cx="11064240" cy="640080"/>
+          </a:xfrm>
+          <a:prstGeom prst="rect">
+            <a:avLst/>
+          </a:prstGeom>
+          <a:noFill/>
+        </p:spPr>
+        <p:txBody>
+          <a:bodyPr wrap="square" anchor="t">
+            <a:spAutoFit/>
+          </a:bodyPr>
+          <a:lstStyle/>
+          <a:p>
+            <a:pPr algn="l">
+              <a:lnSpc>
+                <a:spcPct val="115000"/>
+              </a:lnSpc>
+            </a:pPr>
+            <a:r>
+              <a:rPr sz="1200" b="0">
+                <a:solidFill>
+                  <a:srgbClr val="334155"/>
+                </a:solidFill>
+                <a:latin typeface="Malgun Gothic"/>
+              </a:rPr>
+              <a:t>화면 오른쪽 아래에 있는 ‘A.i 상담사’ 를 누르면, 24시간 언제든 궁금한 점을 물어볼 수 있어요. 이용 방법·기능 위치·수업 안내를 알려주고, 원하면 해당 메뉴로 바로 데려다줘요.</a:t>
+            </a:r>
+          </a:p>
+        </p:txBody>
+      </p:sp>
+      <p:sp>
+        <p:nvSpPr>
+          <p:cNvPr id="12" name="TextBox 11"/>
+          <p:cNvSpPr txBox="1"/>
+          <p:nvPr/>
+        </p:nvSpPr>
+        <p:spPr>
+          <a:xfrm>
+            <a:off x="457200" y="2743200"/>
+            <a:ext cx="5669280" cy="320040"/>
+          </a:xfrm>
+          <a:prstGeom prst="rect">
+            <a:avLst/>
+          </a:prstGeom>
+          <a:noFill/>
+        </p:spPr>
+        <p:txBody>
+          <a:bodyPr wrap="square" anchor="t">
+            <a:spAutoFit/>
+          </a:bodyPr>
+          <a:lstStyle/>
+          <a:p>
+            <a:pPr algn="l">
+              <a:lnSpc>
+                <a:spcPct val="100000"/>
+              </a:lnSpc>
+            </a:pPr>
+            <a:r>
+              <a:rPr sz="1350" b="1">
+                <a:solidFill>
+                  <a:srgbClr val="7C3AED"/>
+                </a:solidFill>
+                <a:latin typeface="Malgun Gothic"/>
+              </a:rPr>
+              <a:t>사용 방법</a:t>
+            </a:r>
+          </a:p>
+        </p:txBody>
+      </p:sp>
+      <p:sp>
+        <p:nvSpPr>
+          <p:cNvPr id="13" name="TextBox 12"/>
+          <p:cNvSpPr txBox="1"/>
+          <p:nvPr/>
+        </p:nvSpPr>
+        <p:spPr>
+          <a:xfrm>
+            <a:off x="457200" y="3108960"/>
+            <a:ext cx="5669280" cy="2377440"/>
+          </a:xfrm>
+          <a:prstGeom prst="rect">
+            <a:avLst/>
+          </a:prstGeom>
+          <a:noFill/>
+        </p:spPr>
+        <p:txBody>
+          <a:bodyPr wrap="square">
+            <a:spAutoFit/>
+          </a:bodyPr>
+          <a:lstStyle/>
+          <a:p>
+            <a:pPr>
+              <a:lnSpc>
+                <a:spcPct val="115000"/>
+              </a:lnSpc>
+              <a:spcAft>
+                <a:spcPts val="600"/>
+              </a:spcAft>
+            </a:pPr>
+            <a:r>
+              <a:rPr sz="1050" b="1">
+                <a:solidFill>
+                  <a:srgbClr val="7C3AED"/>
+                </a:solidFill>
+                <a:latin typeface="Malgun Gothic"/>
+              </a:rPr>
+              <a:t>● </a:t>
+            </a:r>
+            <a:r>
+              <a:rPr sz="1250">
+                <a:solidFill>
+                  <a:srgbClr val="334155"/>
+                </a:solidFill>
+                <a:latin typeface="Malgun Gothic"/>
+              </a:rPr>
+              <a:t>홈 화면 우하단의 A.i 상담사 아이콘을 눌러요.</a:t>
+            </a:r>
+          </a:p>
+          <a:p>
+            <a:pPr>
+              <a:lnSpc>
+                <a:spcPct val="115000"/>
+              </a:lnSpc>
+              <a:spcAft>
+                <a:spcPts val="600"/>
+              </a:spcAft>
+            </a:pPr>
+            <a:r>
+              <a:rPr sz="1050" b="1">
+                <a:solidFill>
+                  <a:srgbClr val="7C3AED"/>
+                </a:solidFill>
+                <a:latin typeface="Malgun Gothic"/>
+              </a:rPr>
+              <a:t>● </a:t>
+            </a:r>
+            <a:r>
+              <a:rPr sz="1250">
+                <a:solidFill>
+                  <a:srgbClr val="334155"/>
+                </a:solidFill>
+                <a:latin typeface="Malgun Gothic"/>
+              </a:rPr>
+              <a:t>채팅창에 궁금한 점을 편하게 입력해요. (예: “복습퀴즈 어디서 해요?”)</a:t>
+            </a:r>
+          </a:p>
+          <a:p>
+            <a:pPr>
+              <a:lnSpc>
+                <a:spcPct val="115000"/>
+              </a:lnSpc>
+              <a:spcAft>
+                <a:spcPts val="600"/>
+              </a:spcAft>
+            </a:pPr>
+            <a:r>
+              <a:rPr sz="1050" b="1">
+                <a:solidFill>
+                  <a:srgbClr val="7C3AED"/>
+                </a:solidFill>
+                <a:latin typeface="Malgun Gothic"/>
+              </a:rPr>
+              <a:t>● </a:t>
+            </a:r>
+            <a:r>
+              <a:rPr sz="1250">
+                <a:solidFill>
+                  <a:srgbClr val="334155"/>
+                </a:solidFill>
+                <a:latin typeface="Malgun Gothic"/>
+              </a:rPr>
+              <a:t>상담사가 답변과 함께 필요한 메뉴로 이동하도록 안내해줘요.</a:t>
+            </a:r>
+          </a:p>
+          <a:p>
+            <a:pPr>
+              <a:lnSpc>
+                <a:spcPct val="115000"/>
+              </a:lnSpc>
+              <a:spcAft>
+                <a:spcPts val="600"/>
+              </a:spcAft>
+            </a:pPr>
+            <a:r>
+              <a:rPr sz="1050" b="1">
+                <a:solidFill>
+                  <a:srgbClr val="7C3AED"/>
+                </a:solidFill>
+                <a:latin typeface="Malgun Gothic"/>
+              </a:rPr>
+              <a:t>● </a:t>
+            </a:r>
+            <a:r>
+              <a:rPr sz="1250">
+                <a:solidFill>
+                  <a:srgbClr val="334155"/>
+                </a:solidFill>
+                <a:latin typeface="Malgun Gothic"/>
+              </a:rPr>
+              <a:t>🎤 마이크로 말해서 물어볼 수도 있어요.</a:t>
+            </a:r>
+          </a:p>
+        </p:txBody>
+      </p:sp>
+      <p:sp>
+        <p:nvSpPr>
+          <p:cNvPr id="14" name="Rounded Rectangle 13"/>
+          <p:cNvSpPr/>
+          <p:nvPr/>
+        </p:nvSpPr>
+        <p:spPr>
+          <a:xfrm>
+            <a:off x="457200" y="4782312"/>
+            <a:ext cx="5669280" cy="1005840"/>
+          </a:xfrm>
+          <a:prstGeom prst="roundRect">
+            <a:avLst/>
+          </a:prstGeom>
+          <a:solidFill>
+            <a:srgbClr val="F4F7FF"/>
+          </a:solidFill>
+          <a:ln w="12700">
+            <a:solidFill>
+              <a:srgbClr val="7C3AED"/>
+            </a:solidFill>
+          </a:ln>
+          <a:effectLst/>
+        </p:spPr>
+        <p:style>
+          <a:lnRef idx="1">
+            <a:schemeClr val="accent1"/>
+          </a:lnRef>
+          <a:fillRef idx="3">
+            <a:schemeClr val="accent1"/>
+          </a:fillRef>
+          <a:effectRef idx="2">
+            <a:schemeClr val="accent1"/>
+          </a:effectRef>
+          <a:fontRef idx="minor">
+            <a:schemeClr val="lt1"/>
+          </a:fontRef>
+        </p:style>
+        <p:txBody>
+          <a:bodyPr rtlCol="0" anchor="ctr"/>
+          <a:lstStyle/>
+          <a:p>
+            <a:pPr algn="ctr"/>
+          </a:p>
+        </p:txBody>
+      </p:sp>
+      <p:sp>
+        <p:nvSpPr>
+          <p:cNvPr id="15" name="TextBox 14"/>
+          <p:cNvSpPr txBox="1"/>
+          <p:nvPr/>
+        </p:nvSpPr>
+        <p:spPr>
+          <a:xfrm>
+            <a:off x="594360" y="4837175"/>
+            <a:ext cx="5394960" cy="274320"/>
+          </a:xfrm>
+          <a:prstGeom prst="rect">
+            <a:avLst/>
+          </a:prstGeom>
+          <a:noFill/>
+        </p:spPr>
+        <p:txBody>
+          <a:bodyPr wrap="square" anchor="t">
+            <a:spAutoFit/>
+          </a:bodyPr>
+          <a:lstStyle/>
+          <a:p>
+            <a:pPr algn="l">
+              <a:lnSpc>
+                <a:spcPct val="100000"/>
+              </a:lnSpc>
+            </a:pPr>
+            <a:r>
+              <a:rPr sz="1150" b="1">
+                <a:solidFill>
+                  <a:srgbClr val="7C3AED"/>
+                </a:solidFill>
+                <a:latin typeface="Malgun Gothic"/>
+              </a:rPr>
+              <a:t>✅ 핵심 포인트</a:t>
+            </a:r>
+          </a:p>
+        </p:txBody>
+      </p:sp>
+      <p:sp>
+        <p:nvSpPr>
+          <p:cNvPr id="16" name="TextBox 15"/>
+          <p:cNvSpPr txBox="1"/>
+          <p:nvPr/>
+        </p:nvSpPr>
+        <p:spPr>
+          <a:xfrm>
+            <a:off x="594360" y="5111496"/>
+            <a:ext cx="5394960" cy="640080"/>
+          </a:xfrm>
+          <a:prstGeom prst="rect">
+            <a:avLst/>
+          </a:prstGeom>
+          <a:noFill/>
+        </p:spPr>
+        <p:txBody>
+          <a:bodyPr wrap="square">
+            <a:spAutoFit/>
+          </a:bodyPr>
+          <a:lstStyle/>
+          <a:p>
+            <a:pPr>
+              <a:lnSpc>
+                <a:spcPct val="115000"/>
+              </a:lnSpc>
+              <a:spcAft>
+                <a:spcPts val="200"/>
+              </a:spcAft>
+            </a:pPr>
+            <a:r>
+              <a:rPr sz="900" b="1">
+                <a:solidFill>
+                  <a:srgbClr val="7C3AED"/>
+                </a:solidFill>
+                <a:latin typeface="Malgun Gothic"/>
+              </a:rPr>
+              <a:t>● </a:t>
+            </a:r>
+            <a:r>
+              <a:rPr sz="1100">
+                <a:solidFill>
+                  <a:srgbClr val="334155"/>
+                </a:solidFill>
+                <a:latin typeface="Malgun Gothic"/>
+              </a:rPr>
+              <a:t>학생게임·발음코치·음성일기 등 기능 위치를 바로 안내해줘요.</a:t>
+            </a:r>
+          </a:p>
+          <a:p>
+            <a:pPr>
+              <a:lnSpc>
+                <a:spcPct val="115000"/>
+              </a:lnSpc>
+              <a:spcAft>
+                <a:spcPts val="200"/>
+              </a:spcAft>
+            </a:pPr>
+            <a:r>
+              <a:rPr sz="900" b="1">
+                <a:solidFill>
+                  <a:srgbClr val="7C3AED"/>
+                </a:solidFill>
+                <a:latin typeface="Malgun Gothic"/>
+              </a:rPr>
+              <a:t>● </a:t>
+            </a:r>
+            <a:r>
+              <a:rPr sz="1100">
+                <a:solidFill>
+                  <a:srgbClr val="334155"/>
+                </a:solidFill>
+                <a:latin typeface="Malgun Gothic"/>
+              </a:rPr>
+              <a:t>언제든(밤·주말에도) 물어볼 수 있어 혼자서도 척척 이용할 수 있어요.</a:t>
+            </a:r>
+          </a:p>
+        </p:txBody>
+      </p:sp>
+      <p:sp>
+        <p:nvSpPr>
+          <p:cNvPr id="17" name="Rounded Rectangle 16"/>
+          <p:cNvSpPr/>
+          <p:nvPr/>
+        </p:nvSpPr>
+        <p:spPr>
+          <a:xfrm>
+            <a:off x="457200" y="5897879"/>
+            <a:ext cx="5669280" cy="640080"/>
+          </a:xfrm>
+          <a:prstGeom prst="roundRect">
+            <a:avLst/>
+          </a:prstGeom>
+          <a:solidFill>
+            <a:srgbClr val="FFFBEB"/>
+          </a:solidFill>
+          <a:ln w="12700">
+            <a:solidFill>
+              <a:srgbClr val="F59E0B"/>
+            </a:solidFill>
+          </a:ln>
+          <a:effectLst/>
+        </p:spPr>
+        <p:style>
+          <a:lnRef idx="1">
+            <a:schemeClr val="accent1"/>
+          </a:lnRef>
+          <a:fillRef idx="3">
+            <a:schemeClr val="accent1"/>
+          </a:fillRef>
+          <a:effectRef idx="2">
+            <a:schemeClr val="accent1"/>
+          </a:effectRef>
+          <a:fontRef idx="minor">
+            <a:schemeClr val="lt1"/>
+          </a:fontRef>
+        </p:style>
+        <p:txBody>
+          <a:bodyPr rtlCol="0" anchor="ctr"/>
+          <a:lstStyle/>
+          <a:p>
+            <a:pPr algn="ctr"/>
+          </a:p>
+        </p:txBody>
+      </p:sp>
+      <p:sp>
+        <p:nvSpPr>
+          <p:cNvPr id="18" name="TextBox 17"/>
+          <p:cNvSpPr txBox="1"/>
+          <p:nvPr/>
+        </p:nvSpPr>
+        <p:spPr>
+          <a:xfrm>
+            <a:off x="594360" y="5943599"/>
+            <a:ext cx="5394960" cy="548640"/>
+          </a:xfrm>
+          <a:prstGeom prst="rect">
+            <a:avLst/>
+          </a:prstGeom>
+          <a:noFill/>
+        </p:spPr>
+        <p:txBody>
+          <a:bodyPr wrap="square" anchor="t">
+            <a:spAutoFit/>
+          </a:bodyPr>
+          <a:lstStyle/>
+          <a:p>
+            <a:pPr algn="l">
+              <a:lnSpc>
+                <a:spcPct val="105000"/>
+              </a:lnSpc>
+            </a:pPr>
+            <a:r>
+              <a:rPr sz="1050" b="0">
+                <a:solidFill>
+                  <a:srgbClr val="92670A"/>
+                </a:solidFill>
+                <a:latin typeface="Malgun Gothic"/>
+              </a:rPr>
+              <a:t>⚠️ 알아두기 · 운영·결제 등 사람이 도와야 하는 문의는 카카오톡 상담이나 고객센터로 연결돼요.</a:t>
+            </a:r>
+          </a:p>
+        </p:txBody>
+      </p:sp>
+      <p:sp>
+        <p:nvSpPr>
+          <p:cNvPr id="19" name="Rounded Rectangle 18"/>
+          <p:cNvSpPr/>
+          <p:nvPr/>
+        </p:nvSpPr>
+        <p:spPr>
+          <a:xfrm>
+            <a:off x="457200" y="6629399"/>
+            <a:ext cx="5669280" cy="658368"/>
+          </a:xfrm>
+          <a:prstGeom prst="roundRect">
+            <a:avLst/>
+          </a:prstGeom>
+          <a:solidFill>
+            <a:srgbClr val="FFF7E6"/>
+          </a:solidFill>
+          <a:ln w="12700">
+            <a:solidFill>
+              <a:srgbClr val="FF9F1C"/>
+            </a:solidFill>
+          </a:ln>
+          <a:effectLst/>
+        </p:spPr>
+        <p:style>
+          <a:lnRef idx="1">
+            <a:schemeClr val="accent1"/>
+          </a:lnRef>
+          <a:fillRef idx="3">
+            <a:schemeClr val="accent1"/>
+          </a:fillRef>
+          <a:effectRef idx="2">
+            <a:schemeClr val="accent1"/>
+          </a:effectRef>
+          <a:fontRef idx="minor">
+            <a:schemeClr val="lt1"/>
+          </a:fontRef>
+        </p:style>
+        <p:txBody>
+          <a:bodyPr rtlCol="0" anchor="ctr"/>
+          <a:lstStyle/>
+          <a:p>
+            <a:pPr algn="ctr"/>
+          </a:p>
+        </p:txBody>
+      </p:sp>
+      <p:sp>
+        <p:nvSpPr>
+          <p:cNvPr id="20" name="TextBox 19"/>
+          <p:cNvSpPr txBox="1"/>
+          <p:nvPr/>
+        </p:nvSpPr>
+        <p:spPr>
+          <a:xfrm>
+            <a:off x="594360" y="6675119"/>
+            <a:ext cx="5394960" cy="566928"/>
+          </a:xfrm>
+          <a:prstGeom prst="rect">
+            <a:avLst/>
+          </a:prstGeom>
+          <a:noFill/>
+        </p:spPr>
+        <p:txBody>
+          <a:bodyPr wrap="square" anchor="t">
+            <a:spAutoFit/>
+          </a:bodyPr>
+          <a:lstStyle/>
+          <a:p>
+            <a:pPr algn="l">
+              <a:lnSpc>
+                <a:spcPct val="105000"/>
+              </a:lnSpc>
+            </a:pPr>
+            <a:r>
+              <a:rPr sz="1050" b="0">
+                <a:solidFill>
+                  <a:srgbClr val="5B4A2A"/>
+                </a:solidFill>
+                <a:latin typeface="Malgun Gothic"/>
+              </a:rPr>
+              <a:t>💡 꿀팁 · “○○ 하고 싶어요”처럼 하고 싶은 걸 말하면, 그 화면으로 데려다줘요.</a:t>
+            </a:r>
+          </a:p>
+        </p:txBody>
+      </p:sp>
+      <p:sp>
+        <p:nvSpPr>
+          <p:cNvPr id="21" name="Rectangle 20"/>
+          <p:cNvSpPr/>
+          <p:nvPr/>
+        </p:nvSpPr>
+        <p:spPr>
+          <a:xfrm>
+            <a:off x="6300216" y="2345436"/>
+            <a:ext cx="5596128" cy="3538728"/>
+          </a:xfrm>
+          <a:prstGeom prst="rect">
+            <a:avLst/>
+          </a:prstGeom>
+          <a:solidFill>
+            <a:srgbClr val="FFFFFF"/>
+          </a:solidFill>
+          <a:ln w="12700">
+            <a:solidFill>
+              <a:srgbClr val="E2E8F0"/>
+            </a:solidFill>
+          </a:ln>
+          <a:effectLst/>
+        </p:spPr>
+        <p:style>
+          <a:lnRef idx="1">
+            <a:schemeClr val="accent1"/>
+          </a:lnRef>
+          <a:fillRef idx="3">
+            <a:schemeClr val="accent1"/>
+          </a:fillRef>
+          <a:effectRef idx="2">
+            <a:schemeClr val="accent1"/>
+          </a:effectRef>
+          <a:fontRef idx="minor">
+            <a:schemeClr val="lt1"/>
+          </a:fontRef>
+        </p:style>
+        <p:txBody>
+          <a:bodyPr rtlCol="0" anchor="ctr"/>
+          <a:lstStyle/>
+          <a:p>
+            <a:pPr algn="ctr"/>
+          </a:p>
+        </p:txBody>
+      </p:sp>
+      <p:pic>
+        <p:nvPicPr>
+          <p:cNvPr id="22" name="Picture 21" descr="student_aiavatar.jpg"/>
+          <p:cNvPicPr>
+            <a:picLocks noChangeAspect="1"/>
+          </p:cNvPicPr>
+          <p:nvPr/>
+        </p:nvPicPr>
+        <p:blipFill>
+          <a:blip r:embed="rId2"/>
+          <a:stretch>
+            <a:fillRect/>
+          </a:stretch>
+        </p:blipFill>
+        <p:spPr>
+          <a:xfrm>
+            <a:off x="6355080" y="2400300"/>
+            <a:ext cx="5486400" cy="3429000"/>
+          </a:xfrm>
+          <a:prstGeom prst="rect">
+            <a:avLst/>
+          </a:prstGeom>
+        </p:spPr>
+      </p:pic>
+    </p:spTree>
+  </p:cSld>
+  <p:clrMapOvr>
+    <a:masterClrMapping/>
+  </p:clrMapOvr>
+</p:sld>
+</file>
+
+<file path=ppt/slides/slide43.xml><?xml version="1.0" encoding="utf-8"?>
 <p:sld xmlns:a="http://schemas.openxmlformats.org/drawingml/2006/main" xmlns:p="http://schemas.openxmlformats.org/presentationml/2006/main" xmlns:r="http://schemas.openxmlformats.org/officeDocument/2006/relationships">
   <p:cSld>
     <p:bg>
@@ -36846,7 +39862,7 @@
 </p:sld>
 </file>
 
-<file path=ppt/slides/slide41.xml><?xml version="1.0" encoding="utf-8"?>
+<file path=ppt/slides/slide44.xml><?xml version="1.0" encoding="utf-8"?>
 <p:sld xmlns:a="http://schemas.openxmlformats.org/drawingml/2006/main" xmlns:p="http://schemas.openxmlformats.org/presentationml/2006/main" xmlns:r="http://schemas.openxmlformats.org/officeDocument/2006/relationships">
   <p:cSld>
     <p:bg>
@@ -37191,7 +40207,7 @@
 </p:sld>
 </file>
 
-<file path=ppt/slides/slide42.xml><?xml version="1.0" encoding="utf-8"?>
+<file path=ppt/slides/slide45.xml><?xml version="1.0" encoding="utf-8"?>
 <p:sld xmlns:a="http://schemas.openxmlformats.org/drawingml/2006/main" xmlns:p="http://schemas.openxmlformats.org/presentationml/2006/main" xmlns:r="http://schemas.openxmlformats.org/officeDocument/2006/relationships">
   <p:cSld>
     <p:bg>
@@ -38166,7 +41182,7 @@
 </p:sld>
 </file>
 
-<file path=ppt/slides/slide43.xml><?xml version="1.0" encoding="utf-8"?>
+<file path=ppt/slides/slide46.xml><?xml version="1.0" encoding="utf-8"?>
 <p:sld xmlns:a="http://schemas.openxmlformats.org/drawingml/2006/main" xmlns:p="http://schemas.openxmlformats.org/presentationml/2006/main" xmlns:r="http://schemas.openxmlformats.org/officeDocument/2006/relationships">
   <p:cSld>
     <p:bg>
@@ -39016,7 +42032,7 @@
 </p:sld>
 </file>
 
-<file path=ppt/slides/slide44.xml><?xml version="1.0" encoding="utf-8"?>
+<file path=ppt/slides/slide47.xml><?xml version="1.0" encoding="utf-8"?>
 <p:sld xmlns:a="http://schemas.openxmlformats.org/drawingml/2006/main" xmlns:p="http://schemas.openxmlformats.org/presentationml/2006/main" xmlns:r="http://schemas.openxmlformats.org/officeDocument/2006/relationships">
   <p:cSld>
     <p:bg>
@@ -40440,7 +43456,7 @@
 </p:sld>
 </file>
 
-<file path=ppt/slides/slide45.xml><?xml version="1.0" encoding="utf-8"?>
+<file path=ppt/slides/slide48.xml><?xml version="1.0" encoding="utf-8"?>
 <p:sld xmlns:a="http://schemas.openxmlformats.org/drawingml/2006/main" xmlns:p="http://schemas.openxmlformats.org/presentationml/2006/main" xmlns:r="http://schemas.openxmlformats.org/officeDocument/2006/relationships">
   <p:cSld>
     <p:bg>

--- a/cloudflare-deploy/public/library/student/student-kr.pptx
+++ b/cloudflare-deploy/public/library/student/student-kr.pptx
@@ -4133,7 +4133,7 @@
                 </a:solidFill>
                 <a:latin typeface="Malgun Gothic"/>
               </a:rPr>
-              <a:t>대상 · 망고아이로 공부하는 학생 친구들   |   test.mangoi.co.kr</a:t>
+              <a:t>대상 · 망고아이로 공부하는 학생 친구들   |   www.mangoi.co.kr</a:t>
             </a:r>
           </a:p>
         </p:txBody>
@@ -24647,7 +24647,7 @@
                 </a:solidFill>
                 <a:latin typeface="Malgun Gothic"/>
               </a:rPr>
-              <a:t>브라우저에서 test.mangoi.co.kr 에 접속하고 로그인해요. (소셜 로그인도 가능)</a:t>
+              <a:t>브라우저에서 www.mangoi.co.kr 에 접속하고 로그인해요. (소셜 로그인도 가능)</a:t>
             </a:r>
           </a:p>
           <a:p>
@@ -43718,7 +43718,7 @@
                 </a:solidFill>
                 <a:latin typeface="Malgun Gothic"/>
               </a:rPr>
-              <a:t>🌐 test.mangoi.co.kr    📞 1588-0000    ✉ support@mangoi.co.kr</a:t>
+              <a:t>🌐 www.mangoi.co.kr    📞 1644-0561    ✉ support@mangoi.co.kr</a:t>
             </a:r>
           </a:p>
         </p:txBody>

--- a/cloudflare-deploy/public/library/student/student-kr.pptx
+++ b/cloudflare-deploy/public/library/student/student-kr.pptx
@@ -6,6 +6,7 @@
   </p:sldMasterIdLst>
   <p:sldIdLst>
     <p:sldId id="256" r:id="rId7"/>
+    <p:sldId id="304" r:id="rId55"/>
     <p:sldId id="257" r:id="rId8"/>
     <p:sldId id="258" r:id="rId9"/>
     <p:sldId id="259" r:id="rId10"/>
@@ -38855,7 +38856,7 @@
         </p:nvSpPr>
         <p:spPr>
           <a:xfrm>
-            <a:off x="365760" y="868680"/>
+            <a:off x="987552" y="868680"/>
             <a:ext cx="9144000" cy="457200"/>
           </a:xfrm>
           <a:prstGeom prst="rect">
@@ -39854,6 +39855,89 @@
           </a:graphicData>
         </a:graphic>
       </p:graphicFrame>
+      <p:sp>
+        <p:nvSpPr>
+          <p:cNvPr id="6" name="Rounded Rectangle 5"/>
+          <p:cNvSpPr/>
+          <p:nvPr/>
+        </p:nvSpPr>
+        <p:spPr>
+          <a:xfrm>
+            <a:off x="365760" y="841247"/>
+            <a:ext cx="475488" cy="475488"/>
+          </a:xfrm>
+          <a:prstGeom prst="roundRect">
+            <a:avLst/>
+          </a:prstGeom>
+          <a:solidFill>
+            <a:srgbClr val="7C3AED"/>
+          </a:solidFill>
+          <a:ln>
+            <a:noFill/>
+          </a:ln>
+          <a:effectLst/>
+        </p:spPr>
+        <p:style>
+          <a:lnRef idx="1">
+            <a:schemeClr val="accent1"/>
+          </a:lnRef>
+          <a:fillRef idx="3">
+            <a:schemeClr val="accent1"/>
+          </a:fillRef>
+          <a:effectRef idx="2">
+            <a:schemeClr val="accent1"/>
+          </a:effectRef>
+          <a:fontRef idx="minor">
+            <a:schemeClr val="lt1"/>
+          </a:fontRef>
+        </p:style>
+        <p:txBody>
+          <a:bodyPr rtlCol="0" anchor="ctr"/>
+          <a:lstStyle/>
+          <a:p>
+            <a:pPr algn="ctr"/>
+          </a:p>
+        </p:txBody>
+      </p:sp>
+      <p:sp>
+        <p:nvSpPr>
+          <p:cNvPr id="7" name="TextBox 6"/>
+          <p:cNvSpPr txBox="1"/>
+          <p:nvPr/>
+        </p:nvSpPr>
+        <p:spPr>
+          <a:xfrm>
+            <a:off x="365760" y="841247"/>
+            <a:ext cx="475488" cy="475488"/>
+          </a:xfrm>
+          <a:prstGeom prst="rect">
+            <a:avLst/>
+          </a:prstGeom>
+          <a:noFill/>
+        </p:spPr>
+        <p:txBody>
+          <a:bodyPr wrap="square" anchor="ctr">
+            <a:spAutoFit/>
+          </a:bodyPr>
+          <a:lstStyle/>
+          <a:p>
+            <a:pPr algn="ctr">
+              <a:lnSpc>
+                <a:spcPct val="100000"/>
+              </a:lnSpc>
+            </a:pPr>
+            <a:r>
+              <a:rPr sz="1500" b="1">
+                <a:solidFill>
+                  <a:srgbClr val="FFFFFF"/>
+                </a:solidFill>
+                <a:latin typeface="Malgun Gothic"/>
+              </a:rPr>
+              <a:t>41</a:t>
+            </a:r>
+          </a:p>
+        </p:txBody>
+      </p:sp>
     </p:spTree>
   </p:cSld>
   <p:clrMapOvr>
@@ -40054,7 +40138,7 @@
         </p:nvSpPr>
         <p:spPr>
           <a:xfrm>
-            <a:off x="365760" y="868680"/>
+            <a:off x="987552" y="868680"/>
             <a:ext cx="9144000" cy="457200"/>
           </a:xfrm>
           <a:prstGeom prst="rect">
@@ -40199,6 +40283,89 @@
           </a:graphicData>
         </a:graphic>
       </p:graphicFrame>
+      <p:sp>
+        <p:nvSpPr>
+          <p:cNvPr id="6" name="Rounded Rectangle 5"/>
+          <p:cNvSpPr/>
+          <p:nvPr/>
+        </p:nvSpPr>
+        <p:spPr>
+          <a:xfrm>
+            <a:off x="365760" y="841247"/>
+            <a:ext cx="475488" cy="475488"/>
+          </a:xfrm>
+          <a:prstGeom prst="roundRect">
+            <a:avLst/>
+          </a:prstGeom>
+          <a:solidFill>
+            <a:srgbClr val="7C3AED"/>
+          </a:solidFill>
+          <a:ln>
+            <a:noFill/>
+          </a:ln>
+          <a:effectLst/>
+        </p:spPr>
+        <p:style>
+          <a:lnRef idx="1">
+            <a:schemeClr val="accent1"/>
+          </a:lnRef>
+          <a:fillRef idx="3">
+            <a:schemeClr val="accent1"/>
+          </a:fillRef>
+          <a:effectRef idx="2">
+            <a:schemeClr val="accent1"/>
+          </a:effectRef>
+          <a:fontRef idx="minor">
+            <a:schemeClr val="lt1"/>
+          </a:fontRef>
+        </p:style>
+        <p:txBody>
+          <a:bodyPr rtlCol="0" anchor="ctr"/>
+          <a:lstStyle/>
+          <a:p>
+            <a:pPr algn="ctr"/>
+          </a:p>
+        </p:txBody>
+      </p:sp>
+      <p:sp>
+        <p:nvSpPr>
+          <p:cNvPr id="7" name="TextBox 6"/>
+          <p:cNvSpPr txBox="1"/>
+          <p:nvPr/>
+        </p:nvSpPr>
+        <p:spPr>
+          <a:xfrm>
+            <a:off x="365760" y="841247"/>
+            <a:ext cx="475488" cy="475488"/>
+          </a:xfrm>
+          <a:prstGeom prst="rect">
+            <a:avLst/>
+          </a:prstGeom>
+          <a:noFill/>
+        </p:spPr>
+        <p:txBody>
+          <a:bodyPr wrap="square" anchor="ctr">
+            <a:spAutoFit/>
+          </a:bodyPr>
+          <a:lstStyle/>
+          <a:p>
+            <a:pPr algn="ctr">
+              <a:lnSpc>
+                <a:spcPct val="100000"/>
+              </a:lnSpc>
+            </a:pPr>
+            <a:r>
+              <a:rPr sz="1500" b="1">
+                <a:solidFill>
+                  <a:srgbClr val="FFFFFF"/>
+                </a:solidFill>
+                <a:latin typeface="Malgun Gothic"/>
+              </a:rPr>
+              <a:t>42</a:t>
+            </a:r>
+          </a:p>
+        </p:txBody>
+      </p:sp>
     </p:spTree>
   </p:cSld>
   <p:clrMapOvr>
@@ -40399,7 +40566,7 @@
         </p:nvSpPr>
         <p:spPr>
           <a:xfrm>
-            <a:off x="365760" y="868680"/>
+            <a:off x="987552" y="868680"/>
             <a:ext cx="9144000" cy="457200"/>
           </a:xfrm>
           <a:prstGeom prst="rect">
@@ -41170,6 +41337,89 @@
                 <a:latin typeface="Malgun Gothic"/>
               </a:rPr>
               <a:t>A. AI 친구·음성코치는 틀려도 괜찮아요. 레벨테스트로 내 수준을 맞추면 훨씬 쉬워져요.</a:t>
+            </a:r>
+          </a:p>
+        </p:txBody>
+      </p:sp>
+      <p:sp>
+        <p:nvSpPr>
+          <p:cNvPr id="6" name="Rounded Rectangle 5"/>
+          <p:cNvSpPr/>
+          <p:nvPr/>
+        </p:nvSpPr>
+        <p:spPr>
+          <a:xfrm>
+            <a:off x="365760" y="841247"/>
+            <a:ext cx="475488" cy="475488"/>
+          </a:xfrm>
+          <a:prstGeom prst="roundRect">
+            <a:avLst/>
+          </a:prstGeom>
+          <a:solidFill>
+            <a:srgbClr val="7C3AED"/>
+          </a:solidFill>
+          <a:ln>
+            <a:noFill/>
+          </a:ln>
+          <a:effectLst/>
+        </p:spPr>
+        <p:style>
+          <a:lnRef idx="1">
+            <a:schemeClr val="accent1"/>
+          </a:lnRef>
+          <a:fillRef idx="3">
+            <a:schemeClr val="accent1"/>
+          </a:fillRef>
+          <a:effectRef idx="2">
+            <a:schemeClr val="accent1"/>
+          </a:effectRef>
+          <a:fontRef idx="minor">
+            <a:schemeClr val="lt1"/>
+          </a:fontRef>
+        </p:style>
+        <p:txBody>
+          <a:bodyPr rtlCol="0" anchor="ctr"/>
+          <a:lstStyle/>
+          <a:p>
+            <a:pPr algn="ctr"/>
+          </a:p>
+        </p:txBody>
+      </p:sp>
+      <p:sp>
+        <p:nvSpPr>
+          <p:cNvPr id="7" name="TextBox 6"/>
+          <p:cNvSpPr txBox="1"/>
+          <p:nvPr/>
+        </p:nvSpPr>
+        <p:spPr>
+          <a:xfrm>
+            <a:off x="365760" y="841247"/>
+            <a:ext cx="475488" cy="475488"/>
+          </a:xfrm>
+          <a:prstGeom prst="rect">
+            <a:avLst/>
+          </a:prstGeom>
+          <a:noFill/>
+        </p:spPr>
+        <p:txBody>
+          <a:bodyPr wrap="square" anchor="ctr">
+            <a:spAutoFit/>
+          </a:bodyPr>
+          <a:lstStyle/>
+          <a:p>
+            <a:pPr algn="ctr">
+              <a:lnSpc>
+                <a:spcPct val="100000"/>
+              </a:lnSpc>
+            </a:pPr>
+            <a:r>
+              <a:rPr sz="1500" b="1">
+                <a:solidFill>
+                  <a:srgbClr val="FFFFFF"/>
+                </a:solidFill>
+                <a:latin typeface="Malgun Gothic"/>
+              </a:rPr>
+              <a:t>43</a:t>
             </a:r>
           </a:p>
         </p:txBody>
@@ -41374,7 +41624,7 @@
         </p:nvSpPr>
         <p:spPr>
           <a:xfrm>
-            <a:off x="365760" y="868680"/>
+            <a:off x="987552" y="868680"/>
             <a:ext cx="9144000" cy="457200"/>
           </a:xfrm>
           <a:prstGeom prst="rect">
@@ -42024,6 +42274,89 @@
           </a:prstGeom>
         </p:spPr>
       </p:pic>
+      <p:sp>
+        <p:nvSpPr>
+          <p:cNvPr id="6" name="Rounded Rectangle 5"/>
+          <p:cNvSpPr/>
+          <p:nvPr/>
+        </p:nvSpPr>
+        <p:spPr>
+          <a:xfrm>
+            <a:off x="365760" y="841247"/>
+            <a:ext cx="475488" cy="475488"/>
+          </a:xfrm>
+          <a:prstGeom prst="roundRect">
+            <a:avLst/>
+          </a:prstGeom>
+          <a:solidFill>
+            <a:srgbClr val="7C3AED"/>
+          </a:solidFill>
+          <a:ln>
+            <a:noFill/>
+          </a:ln>
+          <a:effectLst/>
+        </p:spPr>
+        <p:style>
+          <a:lnRef idx="1">
+            <a:schemeClr val="accent1"/>
+          </a:lnRef>
+          <a:fillRef idx="3">
+            <a:schemeClr val="accent1"/>
+          </a:fillRef>
+          <a:effectRef idx="2">
+            <a:schemeClr val="accent1"/>
+          </a:effectRef>
+          <a:fontRef idx="minor">
+            <a:schemeClr val="lt1"/>
+          </a:fontRef>
+        </p:style>
+        <p:txBody>
+          <a:bodyPr rtlCol="0" anchor="ctr"/>
+          <a:lstStyle/>
+          <a:p>
+            <a:pPr algn="ctr"/>
+          </a:p>
+        </p:txBody>
+      </p:sp>
+      <p:sp>
+        <p:nvSpPr>
+          <p:cNvPr id="7" name="TextBox 6"/>
+          <p:cNvSpPr txBox="1"/>
+          <p:nvPr/>
+        </p:nvSpPr>
+        <p:spPr>
+          <a:xfrm>
+            <a:off x="365760" y="841247"/>
+            <a:ext cx="475488" cy="475488"/>
+          </a:xfrm>
+          <a:prstGeom prst="rect">
+            <a:avLst/>
+          </a:prstGeom>
+          <a:noFill/>
+        </p:spPr>
+        <p:txBody>
+          <a:bodyPr wrap="square" anchor="ctr">
+            <a:spAutoFit/>
+          </a:bodyPr>
+          <a:lstStyle/>
+          <a:p>
+            <a:pPr algn="ctr">
+              <a:lnSpc>
+                <a:spcPct val="100000"/>
+              </a:lnSpc>
+            </a:pPr>
+            <a:r>
+              <a:rPr sz="1500" b="1">
+                <a:solidFill>
+                  <a:srgbClr val="FFFFFF"/>
+                </a:solidFill>
+                <a:latin typeface="Malgun Gothic"/>
+              </a:rPr>
+              <a:t>44</a:t>
+            </a:r>
+          </a:p>
+        </p:txBody>
+      </p:sp>
     </p:spTree>
   </p:cSld>
   <p:clrMapOvr>
@@ -42224,7 +42557,7 @@
         </p:nvSpPr>
         <p:spPr>
           <a:xfrm>
-            <a:off x="365760" y="822960"/>
+            <a:off x="987552" y="822960"/>
             <a:ext cx="11430000" cy="457200"/>
           </a:xfrm>
           <a:prstGeom prst="rect">
@@ -43444,6 +43777,89 @@
                 <a:latin typeface="Malgun Gothic"/>
               </a:rPr>
               <a:t>🍊 매일 조금씩 꾸준히 하는 친구가 결국 영어를 제일 잘하게 돼요. 틀리는 걸 두려워하지 말고 마음껏 말해 보세요. 망고아이 친구들이 늘 응원할게요. 오늘도 파이팅! 🍊</a:t>
+            </a:r>
+          </a:p>
+        </p:txBody>
+      </p:sp>
+      <p:sp>
+        <p:nvSpPr>
+          <p:cNvPr id="6" name="Rounded Rectangle 5"/>
+          <p:cNvSpPr/>
+          <p:nvPr/>
+        </p:nvSpPr>
+        <p:spPr>
+          <a:xfrm>
+            <a:off x="365760" y="795528"/>
+            <a:ext cx="475488" cy="475488"/>
+          </a:xfrm>
+          <a:prstGeom prst="roundRect">
+            <a:avLst/>
+          </a:prstGeom>
+          <a:solidFill>
+            <a:srgbClr val="7C3AED"/>
+          </a:solidFill>
+          <a:ln>
+            <a:noFill/>
+          </a:ln>
+          <a:effectLst/>
+        </p:spPr>
+        <p:style>
+          <a:lnRef idx="1">
+            <a:schemeClr val="accent1"/>
+          </a:lnRef>
+          <a:fillRef idx="3">
+            <a:schemeClr val="accent1"/>
+          </a:fillRef>
+          <a:effectRef idx="2">
+            <a:schemeClr val="accent1"/>
+          </a:effectRef>
+          <a:fontRef idx="minor">
+            <a:schemeClr val="lt1"/>
+          </a:fontRef>
+        </p:style>
+        <p:txBody>
+          <a:bodyPr rtlCol="0" anchor="ctr"/>
+          <a:lstStyle/>
+          <a:p>
+            <a:pPr algn="ctr"/>
+          </a:p>
+        </p:txBody>
+      </p:sp>
+      <p:sp>
+        <p:nvSpPr>
+          <p:cNvPr id="7" name="TextBox 6"/>
+          <p:cNvSpPr txBox="1"/>
+          <p:nvPr/>
+        </p:nvSpPr>
+        <p:spPr>
+          <a:xfrm>
+            <a:off x="365760" y="795528"/>
+            <a:ext cx="475488" cy="475488"/>
+          </a:xfrm>
+          <a:prstGeom prst="rect">
+            <a:avLst/>
+          </a:prstGeom>
+          <a:noFill/>
+        </p:spPr>
+        <p:txBody>
+          <a:bodyPr wrap="square" anchor="ctr">
+            <a:spAutoFit/>
+          </a:bodyPr>
+          <a:lstStyle/>
+          <a:p>
+            <a:pPr algn="ctr">
+              <a:lnSpc>
+                <a:spcPct val="100000"/>
+              </a:lnSpc>
+            </a:pPr>
+            <a:r>
+              <a:rPr sz="1500" b="1">
+                <a:solidFill>
+                  <a:srgbClr val="FFFFFF"/>
+                </a:solidFill>
+                <a:latin typeface="Malgun Gothic"/>
+              </a:rPr>
+              <a:t>45</a:t>
             </a:r>
           </a:p>
         </p:txBody>
@@ -43719,6 +44135,1834 @@
                 <a:latin typeface="Malgun Gothic"/>
               </a:rPr>
               <a:t>🌐 www.mangoi.co.kr    📞 1644-0561    ✉ support@mangoi.co.kr</a:t>
+            </a:r>
+          </a:p>
+        </p:txBody>
+      </p:sp>
+    </p:spTree>
+  </p:cSld>
+  <p:clrMapOvr>
+    <a:masterClrMapping/>
+  </p:clrMapOvr>
+</p:sld>
+</file>
+
+<file path=ppt/slides/slide49.xml><?xml version="1.0" encoding="utf-8"?>
+<p:sld xmlns:a="http://schemas.openxmlformats.org/drawingml/2006/main" xmlns:p="http://schemas.openxmlformats.org/presentationml/2006/main" xmlns:r="http://schemas.openxmlformats.org/officeDocument/2006/relationships">
+  <p:cSld>
+    <p:spTree>
+      <p:nvGrpSpPr>
+        <p:cNvPr id="1" name=""/>
+        <p:cNvGrpSpPr/>
+        <p:nvPr/>
+      </p:nvGrpSpPr>
+      <p:grpSpPr/>
+      <p:sp>
+        <p:nvSpPr>
+          <p:cNvPr id="2" name="Rectangle 1"/>
+          <p:cNvSpPr/>
+          <p:nvPr/>
+        </p:nvSpPr>
+        <p:spPr>
+          <a:xfrm>
+            <a:off x="0" y="0"/>
+            <a:ext cx="12191695" cy="566928"/>
+          </a:xfrm>
+          <a:prstGeom prst="rect">
+            <a:avLst/>
+          </a:prstGeom>
+          <a:solidFill>
+            <a:srgbClr val="7C3AED"/>
+          </a:solidFill>
+          <a:ln>
+            <a:noFill/>
+          </a:ln>
+          <a:effectLst/>
+        </p:spPr>
+        <p:style>
+          <a:lnRef idx="1">
+            <a:schemeClr val="accent1"/>
+          </a:lnRef>
+          <a:fillRef idx="3">
+            <a:schemeClr val="accent1"/>
+          </a:fillRef>
+          <a:effectRef idx="2">
+            <a:schemeClr val="accent1"/>
+          </a:effectRef>
+          <a:fontRef idx="minor">
+            <a:schemeClr val="lt1"/>
+          </a:fontRef>
+        </p:style>
+        <p:txBody>
+          <a:bodyPr rtlCol="0" anchor="ctr"/>
+          <a:lstStyle/>
+          <a:p>
+            <a:pPr algn="ctr"/>
+          </a:p>
+        </p:txBody>
+      </p:sp>
+      <p:sp>
+        <p:nvSpPr>
+          <p:cNvPr id="3" name="Rectangle 2"/>
+          <p:cNvSpPr/>
+          <p:nvPr/>
+        </p:nvSpPr>
+        <p:spPr>
+          <a:xfrm>
+            <a:off x="0" y="566928"/>
+            <a:ext cx="12191695" cy="54864"/>
+          </a:xfrm>
+          <a:prstGeom prst="rect">
+            <a:avLst/>
+          </a:prstGeom>
+          <a:solidFill>
+            <a:srgbClr val="FF9F1C"/>
+          </a:solidFill>
+          <a:ln>
+            <a:noFill/>
+          </a:ln>
+          <a:effectLst/>
+        </p:spPr>
+        <p:style>
+          <a:lnRef idx="1">
+            <a:schemeClr val="accent1"/>
+          </a:lnRef>
+          <a:fillRef idx="3">
+            <a:schemeClr val="accent1"/>
+          </a:fillRef>
+          <a:effectRef idx="2">
+            <a:schemeClr val="accent1"/>
+          </a:effectRef>
+          <a:fontRef idx="minor">
+            <a:schemeClr val="lt1"/>
+          </a:fontRef>
+        </p:style>
+        <p:txBody>
+          <a:bodyPr rtlCol="0" anchor="ctr"/>
+          <a:lstStyle/>
+          <a:p>
+            <a:pPr algn="ctr"/>
+          </a:p>
+        </p:txBody>
+      </p:sp>
+      <p:sp>
+        <p:nvSpPr>
+          <p:cNvPr id="4" name="TextBox 3"/>
+          <p:cNvSpPr txBox="1"/>
+          <p:nvPr/>
+        </p:nvSpPr>
+        <p:spPr>
+          <a:xfrm>
+            <a:off x="365760" y="27432"/>
+            <a:ext cx="7315200" cy="502920"/>
+          </a:xfrm>
+          <a:prstGeom prst="rect">
+            <a:avLst/>
+          </a:prstGeom>
+          <a:noFill/>
+        </p:spPr>
+        <p:txBody>
+          <a:bodyPr wrap="square" anchor="ctr">
+            <a:spAutoFit/>
+          </a:bodyPr>
+          <a:lstStyle/>
+          <a:p>
+            <a:pPr algn="l">
+              <a:lnSpc>
+                <a:spcPct val="100000"/>
+              </a:lnSpc>
+            </a:pPr>
+            <a:r>
+              <a:rPr sz="1500" b="1">
+                <a:solidFill>
+                  <a:srgbClr val="FFFFFF"/>
+                </a:solidFill>
+                <a:latin typeface="Malgun Gothic"/>
+              </a:rPr>
+              <a:t>🎒 망고아이 학생용 사용설명서</a:t>
+            </a:r>
+          </a:p>
+        </p:txBody>
+      </p:sp>
+      <p:sp>
+        <p:nvSpPr>
+          <p:cNvPr id="5" name="TextBox 4"/>
+          <p:cNvSpPr txBox="1"/>
+          <p:nvPr/>
+        </p:nvSpPr>
+        <p:spPr>
+          <a:xfrm>
+            <a:off x="8168335" y="27432"/>
+            <a:ext cx="3657600" cy="502920"/>
+          </a:xfrm>
+          <a:prstGeom prst="rect">
+            <a:avLst/>
+          </a:prstGeom>
+          <a:noFill/>
+        </p:spPr>
+        <p:txBody>
+          <a:bodyPr wrap="square" anchor="ctr">
+            <a:spAutoFit/>
+          </a:bodyPr>
+          <a:lstStyle/>
+          <a:p>
+            <a:pPr algn="r">
+              <a:lnSpc>
+                <a:spcPct val="100000"/>
+              </a:lnSpc>
+            </a:pPr>
+            <a:r>
+              <a:rPr sz="1300" b="1">
+                <a:solidFill>
+                  <a:srgbClr val="F1F5F9"/>
+                </a:solidFill>
+                <a:latin typeface="Malgun Gothic"/>
+              </a:rPr>
+              <a:t>차례</a:t>
+            </a:r>
+          </a:p>
+        </p:txBody>
+      </p:sp>
+      <p:sp>
+        <p:nvSpPr>
+          <p:cNvPr id="6" name="TextBox 5"/>
+          <p:cNvSpPr txBox="1"/>
+          <p:nvPr/>
+        </p:nvSpPr>
+        <p:spPr>
+          <a:xfrm>
+            <a:off x="365760" y="749808"/>
+            <a:ext cx="7315200" cy="502920"/>
+          </a:xfrm>
+          <a:prstGeom prst="rect">
+            <a:avLst/>
+          </a:prstGeom>
+          <a:noFill/>
+        </p:spPr>
+        <p:txBody>
+          <a:bodyPr wrap="none">
+            <a:spAutoFit/>
+          </a:bodyPr>
+          <a:lstStyle/>
+          <a:p>
+            <a:r>
+              <a:rPr sz="2200" b="1">
+                <a:solidFill>
+                  <a:srgbClr val="1E2340"/>
+                </a:solidFill>
+                <a:latin typeface="Malgun Gothic"/>
+              </a:rPr>
+              <a:t>📑 차례</a:t>
+            </a:r>
+          </a:p>
+        </p:txBody>
+      </p:sp>
+      <p:sp>
+        <p:nvSpPr>
+          <p:cNvPr id="7" name="TextBox 6"/>
+          <p:cNvSpPr txBox="1"/>
+          <p:nvPr/>
+        </p:nvSpPr>
+        <p:spPr>
+          <a:xfrm>
+            <a:off x="365760" y="1417320"/>
+            <a:ext cx="5500116" cy="5212080"/>
+          </a:xfrm>
+          <a:prstGeom prst="rect">
+            <a:avLst/>
+          </a:prstGeom>
+          <a:noFill/>
+        </p:spPr>
+        <p:txBody>
+          <a:bodyPr wrap="none">
+            <a:spAutoFit/>
+          </a:bodyPr>
+          <a:lstStyle/>
+          <a:p>
+            <a:pPr>
+              <a:spcAft>
+                <a:spcPts val="557"/>
+              </a:spcAft>
+            </a:pPr>
+            <a:r>
+              <a:rPr sz="908" b="1">
+                <a:solidFill>
+                  <a:srgbClr val="4F46E5"/>
+                </a:solidFill>
+                <a:latin typeface="Malgun Gothic"/>
+              </a:rPr>
+              <a:t>·   </a:t>
+            </a:r>
+            <a:r>
+              <a:rPr sz="908">
+                <a:solidFill>
+                  <a:srgbClr val="334155"/>
+                </a:solidFill>
+                <a:latin typeface="Malgun Gothic"/>
+              </a:rPr>
+              <a:t>소개</a:t>
+            </a:r>
+            <a:r>
+              <a:rPr sz="758">
+                <a:solidFill>
+                  <a:srgbClr val="94A3B8"/>
+                </a:solidFill>
+                <a:latin typeface="Malgun Gothic"/>
+              </a:rPr>
+              <a:t>   ·  p.3</a:t>
+            </a:r>
+          </a:p>
+          <a:p>
+            <a:pPr>
+              <a:spcAft>
+                <a:spcPts val="557"/>
+              </a:spcAft>
+            </a:pPr>
+            <a:r>
+              <a:rPr sz="908" b="1">
+                <a:solidFill>
+                  <a:srgbClr val="4F46E5"/>
+                </a:solidFill>
+                <a:latin typeface="Malgun Gothic"/>
+              </a:rPr>
+              <a:t>01  </a:t>
+            </a:r>
+            <a:r>
+              <a:rPr sz="908">
+                <a:solidFill>
+                  <a:srgbClr val="334155"/>
+                </a:solidFill>
+                <a:latin typeface="Malgun Gothic"/>
+              </a:rPr>
+              <a:t>🚀 처음 시작하기 &amp; 홈 화면</a:t>
+            </a:r>
+            <a:r>
+              <a:rPr sz="758">
+                <a:solidFill>
+                  <a:srgbClr val="94A3B8"/>
+                </a:solidFill>
+                <a:latin typeface="Malgun Gothic"/>
+              </a:rPr>
+              <a:t>   ·  p.4</a:t>
+            </a:r>
+          </a:p>
+          <a:p>
+            <a:pPr>
+              <a:spcAft>
+                <a:spcPts val="557"/>
+              </a:spcAft>
+            </a:pPr>
+            <a:r>
+              <a:rPr sz="908" b="1">
+                <a:solidFill>
+                  <a:srgbClr val="4F46E5"/>
+                </a:solidFill>
+                <a:latin typeface="Malgun Gothic"/>
+              </a:rPr>
+              <a:t>02  </a:t>
+            </a:r>
+            <a:r>
+              <a:rPr sz="908">
+                <a:solidFill>
+                  <a:srgbClr val="334155"/>
+                </a:solidFill>
+                <a:latin typeface="Malgun Gothic"/>
+              </a:rPr>
+              <a:t>🎥 화상수업 입장하기</a:t>
+            </a:r>
+            <a:r>
+              <a:rPr sz="758">
+                <a:solidFill>
+                  <a:srgbClr val="94A3B8"/>
+                </a:solidFill>
+                <a:latin typeface="Malgun Gothic"/>
+              </a:rPr>
+              <a:t>   ·  p.5</a:t>
+            </a:r>
+          </a:p>
+          <a:p>
+            <a:pPr>
+              <a:spcAft>
+                <a:spcPts val="557"/>
+              </a:spcAft>
+            </a:pPr>
+            <a:r>
+              <a:rPr sz="908" b="1">
+                <a:solidFill>
+                  <a:srgbClr val="4F46E5"/>
+                </a:solidFill>
+                <a:latin typeface="Malgun Gothic"/>
+              </a:rPr>
+              <a:t>03  </a:t>
+            </a:r>
+            <a:r>
+              <a:rPr sz="908">
+                <a:solidFill>
+                  <a:srgbClr val="334155"/>
+                </a:solidFill>
+                <a:latin typeface="Malgun Gothic"/>
+              </a:rPr>
+              <a:t>🖥️ 교실 화면 한눈에 보기</a:t>
+            </a:r>
+            <a:r>
+              <a:rPr sz="758">
+                <a:solidFill>
+                  <a:srgbClr val="94A3B8"/>
+                </a:solidFill>
+                <a:latin typeface="Malgun Gothic"/>
+              </a:rPr>
+              <a:t>   ·  p.6</a:t>
+            </a:r>
+          </a:p>
+          <a:p>
+            <a:pPr>
+              <a:spcAft>
+                <a:spcPts val="557"/>
+              </a:spcAft>
+            </a:pPr>
+            <a:r>
+              <a:rPr sz="908" b="1">
+                <a:solidFill>
+                  <a:srgbClr val="4F46E5"/>
+                </a:solidFill>
+                <a:latin typeface="Malgun Gothic"/>
+              </a:rPr>
+              <a:t>04  </a:t>
+            </a:r>
+            <a:r>
+              <a:rPr sz="908">
+                <a:solidFill>
+                  <a:srgbClr val="334155"/>
+                </a:solidFill>
+                <a:latin typeface="Malgun Gothic"/>
+              </a:rPr>
+              <a:t>🗂️ 상단 탭 6가지 바꾸기</a:t>
+            </a:r>
+            <a:r>
+              <a:rPr sz="758">
+                <a:solidFill>
+                  <a:srgbClr val="94A3B8"/>
+                </a:solidFill>
+                <a:latin typeface="Malgun Gothic"/>
+              </a:rPr>
+              <a:t>   ·  p.7</a:t>
+            </a:r>
+          </a:p>
+          <a:p>
+            <a:pPr>
+              <a:spcAft>
+                <a:spcPts val="557"/>
+              </a:spcAft>
+            </a:pPr>
+            <a:r>
+              <a:rPr sz="908" b="1">
+                <a:solidFill>
+                  <a:srgbClr val="4F46E5"/>
+                </a:solidFill>
+                <a:latin typeface="Malgun Gothic"/>
+              </a:rPr>
+              <a:t>05  </a:t>
+            </a:r>
+            <a:r>
+              <a:rPr sz="908">
+                <a:solidFill>
+                  <a:srgbClr val="334155"/>
+                </a:solidFill>
+                <a:latin typeface="Malgun Gothic"/>
+              </a:rPr>
+              <a:t>🖊️ 칠판 도구 하나하나</a:t>
+            </a:r>
+            <a:r>
+              <a:rPr sz="758">
+                <a:solidFill>
+                  <a:srgbClr val="94A3B8"/>
+                </a:solidFill>
+                <a:latin typeface="Malgun Gothic"/>
+              </a:rPr>
+              <a:t>   ·  p.8</a:t>
+            </a:r>
+          </a:p>
+          <a:p>
+            <a:pPr>
+              <a:spcAft>
+                <a:spcPts val="557"/>
+              </a:spcAft>
+            </a:pPr>
+            <a:r>
+              <a:rPr sz="908" b="1">
+                <a:solidFill>
+                  <a:srgbClr val="4F46E5"/>
+                </a:solidFill>
+                <a:latin typeface="Malgun Gothic"/>
+              </a:rPr>
+              <a:t>06  </a:t>
+            </a:r>
+            <a:r>
+              <a:rPr sz="908">
+                <a:solidFill>
+                  <a:srgbClr val="334155"/>
+                </a:solidFill>
+                <a:latin typeface="Malgun Gothic"/>
+              </a:rPr>
+              <a:t>📚 교재도구 (PDF·사진 공유)</a:t>
+            </a:r>
+            <a:r>
+              <a:rPr sz="758">
+                <a:solidFill>
+                  <a:srgbClr val="94A3B8"/>
+                </a:solidFill>
+                <a:latin typeface="Malgun Gothic"/>
+              </a:rPr>
+              <a:t>   ·  p.9</a:t>
+            </a:r>
+          </a:p>
+          <a:p>
+            <a:pPr>
+              <a:spcAft>
+                <a:spcPts val="557"/>
+              </a:spcAft>
+            </a:pPr>
+            <a:r>
+              <a:rPr sz="908" b="1">
+                <a:solidFill>
+                  <a:srgbClr val="4F46E5"/>
+                </a:solidFill>
+                <a:latin typeface="Malgun Gothic"/>
+              </a:rPr>
+              <a:t>07  </a:t>
+            </a:r>
+            <a:r>
+              <a:rPr sz="908">
+                <a:solidFill>
+                  <a:srgbClr val="334155"/>
+                </a:solidFill>
+                <a:latin typeface="Malgun Gothic"/>
+              </a:rPr>
+              <a:t>✍️ 필기도구 (교재 위에 쓰기)</a:t>
+            </a:r>
+            <a:r>
+              <a:rPr sz="758">
+                <a:solidFill>
+                  <a:srgbClr val="94A3B8"/>
+                </a:solidFill>
+                <a:latin typeface="Malgun Gothic"/>
+              </a:rPr>
+              <a:t>   ·  p.10</a:t>
+            </a:r>
+          </a:p>
+          <a:p>
+            <a:pPr>
+              <a:spcAft>
+                <a:spcPts val="557"/>
+              </a:spcAft>
+            </a:pPr>
+            <a:r>
+              <a:rPr sz="908" b="1">
+                <a:solidFill>
+                  <a:srgbClr val="4F46E5"/>
+                </a:solidFill>
+                <a:latin typeface="Malgun Gothic"/>
+              </a:rPr>
+              <a:t>08  </a:t>
+            </a:r>
+            <a:r>
+              <a:rPr sz="908">
+                <a:solidFill>
+                  <a:srgbClr val="334155"/>
+                </a:solidFill>
+                <a:latin typeface="Malgun Gothic"/>
+              </a:rPr>
+              <a:t>📹 동영상 함께 보기</a:t>
+            </a:r>
+            <a:r>
+              <a:rPr sz="758">
+                <a:solidFill>
+                  <a:srgbClr val="94A3B8"/>
+                </a:solidFill>
+                <a:latin typeface="Malgun Gothic"/>
+              </a:rPr>
+              <a:t>   ·  p.11</a:t>
+            </a:r>
+          </a:p>
+          <a:p>
+            <a:pPr>
+              <a:spcAft>
+                <a:spcPts val="557"/>
+              </a:spcAft>
+            </a:pPr>
+            <a:r>
+              <a:rPr sz="908" b="1">
+                <a:solidFill>
+                  <a:srgbClr val="4F46E5"/>
+                </a:solidFill>
+                <a:latin typeface="Malgun Gothic"/>
+              </a:rPr>
+              <a:t>09  </a:t>
+            </a:r>
+            <a:r>
+              <a:rPr sz="908">
+                <a:solidFill>
+                  <a:srgbClr val="334155"/>
+                </a:solidFill>
+                <a:latin typeface="Malgun Gothic"/>
+              </a:rPr>
+              <a:t>🎨 배경화면 &amp; 얼굴 꾸미기</a:t>
+            </a:r>
+            <a:r>
+              <a:rPr sz="758">
+                <a:solidFill>
+                  <a:srgbClr val="94A3B8"/>
+                </a:solidFill>
+                <a:latin typeface="Malgun Gothic"/>
+              </a:rPr>
+              <a:t>   ·  p.12</a:t>
+            </a:r>
+          </a:p>
+          <a:p>
+            <a:pPr>
+              <a:spcAft>
+                <a:spcPts val="557"/>
+              </a:spcAft>
+            </a:pPr>
+            <a:r>
+              <a:rPr sz="908" b="1">
+                <a:solidFill>
+                  <a:srgbClr val="4F46E5"/>
+                </a:solidFill>
+                <a:latin typeface="Malgun Gothic"/>
+              </a:rPr>
+              <a:t>10  </a:t>
+            </a:r>
+            <a:r>
+              <a:rPr sz="908">
+                <a:solidFill>
+                  <a:srgbClr val="334155"/>
+                </a:solidFill>
+                <a:latin typeface="Malgun Gothic"/>
+              </a:rPr>
+              <a:t>🔲 화면 크기·배치 바꾸기</a:t>
+            </a:r>
+            <a:r>
+              <a:rPr sz="758">
+                <a:solidFill>
+                  <a:srgbClr val="94A3B8"/>
+                </a:solidFill>
+                <a:latin typeface="Malgun Gothic"/>
+              </a:rPr>
+              <a:t>   ·  p.13</a:t>
+            </a:r>
+          </a:p>
+          <a:p>
+            <a:pPr>
+              <a:spcAft>
+                <a:spcPts val="557"/>
+              </a:spcAft>
+            </a:pPr>
+            <a:r>
+              <a:rPr sz="908" b="1">
+                <a:solidFill>
+                  <a:srgbClr val="4F46E5"/>
+                </a:solidFill>
+                <a:latin typeface="Malgun Gothic"/>
+              </a:rPr>
+              <a:t>11  </a:t>
+            </a:r>
+            <a:r>
+              <a:rPr sz="908">
+                <a:solidFill>
+                  <a:srgbClr val="334155"/>
+                </a:solidFill>
+                <a:latin typeface="Malgun Gothic"/>
+              </a:rPr>
+              <a:t>🌟 수업 중 칭찬 포인트</a:t>
+            </a:r>
+            <a:r>
+              <a:rPr sz="758">
+                <a:solidFill>
+                  <a:srgbClr val="94A3B8"/>
+                </a:solidFill>
+                <a:latin typeface="Malgun Gothic"/>
+              </a:rPr>
+              <a:t>   ·  p.14</a:t>
+            </a:r>
+          </a:p>
+          <a:p>
+            <a:pPr>
+              <a:spcAft>
+                <a:spcPts val="557"/>
+              </a:spcAft>
+            </a:pPr>
+            <a:r>
+              <a:rPr sz="908" b="1">
+                <a:solidFill>
+                  <a:srgbClr val="4F46E5"/>
+                </a:solidFill>
+                <a:latin typeface="Malgun Gothic"/>
+              </a:rPr>
+              <a:t>12  </a:t>
+            </a:r>
+            <a:r>
+              <a:rPr sz="908">
+                <a:solidFill>
+                  <a:srgbClr val="334155"/>
+                </a:solidFill>
+                <a:latin typeface="Malgun Gothic"/>
+              </a:rPr>
+              <a:t>🎛️ 하단 독 &amp; 칭찬 바구니</a:t>
+            </a:r>
+            <a:r>
+              <a:rPr sz="758">
+                <a:solidFill>
+                  <a:srgbClr val="94A3B8"/>
+                </a:solidFill>
+                <a:latin typeface="Malgun Gothic"/>
+              </a:rPr>
+              <a:t>   ·  p.15</a:t>
+            </a:r>
+          </a:p>
+          <a:p>
+            <a:pPr>
+              <a:spcAft>
+                <a:spcPts val="557"/>
+              </a:spcAft>
+            </a:pPr>
+            <a:r>
+              <a:rPr sz="908" b="1">
+                <a:solidFill>
+                  <a:srgbClr val="4F46E5"/>
+                </a:solidFill>
+                <a:latin typeface="Malgun Gothic"/>
+              </a:rPr>
+              <a:t>13  </a:t>
+            </a:r>
+            <a:r>
+              <a:rPr sz="908">
+                <a:solidFill>
+                  <a:srgbClr val="334155"/>
+                </a:solidFill>
+                <a:latin typeface="Malgun Gothic"/>
+              </a:rPr>
+              <a:t>🙋 수업 중 이렇게 참여해요</a:t>
+            </a:r>
+            <a:r>
+              <a:rPr sz="758">
+                <a:solidFill>
+                  <a:srgbClr val="94A3B8"/>
+                </a:solidFill>
+                <a:latin typeface="Malgun Gothic"/>
+              </a:rPr>
+              <a:t>   ·  p.16</a:t>
+            </a:r>
+          </a:p>
+          <a:p>
+            <a:pPr>
+              <a:spcAft>
+                <a:spcPts val="557"/>
+              </a:spcAft>
+            </a:pPr>
+            <a:r>
+              <a:rPr sz="908" b="1">
+                <a:solidFill>
+                  <a:srgbClr val="4F46E5"/>
+                </a:solidFill>
+                <a:latin typeface="Malgun Gothic"/>
+              </a:rPr>
+              <a:t>14  </a:t>
+            </a:r>
+            <a:r>
+              <a:rPr sz="908">
+                <a:solidFill>
+                  <a:srgbClr val="334155"/>
+                </a:solidFill>
+                <a:latin typeface="Malgun Gothic"/>
+              </a:rPr>
+              <a:t>🏁 수업이 끝나면 — 복습 &amp; 별점</a:t>
+            </a:r>
+            <a:r>
+              <a:rPr sz="758">
+                <a:solidFill>
+                  <a:srgbClr val="94A3B8"/>
+                </a:solidFill>
+                <a:latin typeface="Malgun Gothic"/>
+              </a:rPr>
+              <a:t>   ·  p.17</a:t>
+            </a:r>
+          </a:p>
+          <a:p>
+            <a:pPr>
+              <a:spcAft>
+                <a:spcPts val="557"/>
+              </a:spcAft>
+            </a:pPr>
+            <a:r>
+              <a:rPr sz="908" b="1">
+                <a:solidFill>
+                  <a:srgbClr val="4F46E5"/>
+                </a:solidFill>
+                <a:latin typeface="Malgun Gothic"/>
+              </a:rPr>
+              <a:t>15  </a:t>
+            </a:r>
+            <a:r>
+              <a:rPr sz="908">
+                <a:solidFill>
+                  <a:srgbClr val="334155"/>
+                </a:solidFill>
+                <a:latin typeface="Malgun Gothic"/>
+              </a:rPr>
+              <a:t>🩺 수업 전 장비 점검</a:t>
+            </a:r>
+            <a:r>
+              <a:rPr sz="758">
+                <a:solidFill>
+                  <a:srgbClr val="94A3B8"/>
+                </a:solidFill>
+                <a:latin typeface="Malgun Gothic"/>
+              </a:rPr>
+              <a:t>   ·  p.18</a:t>
+            </a:r>
+          </a:p>
+          <a:p>
+            <a:pPr>
+              <a:spcAft>
+                <a:spcPts val="557"/>
+              </a:spcAft>
+            </a:pPr>
+            <a:r>
+              <a:rPr sz="908" b="1">
+                <a:solidFill>
+                  <a:srgbClr val="4F46E5"/>
+                </a:solidFill>
+                <a:latin typeface="Malgun Gothic"/>
+              </a:rPr>
+              <a:t>16  </a:t>
+            </a:r>
+            <a:r>
+              <a:rPr sz="908">
+                <a:solidFill>
+                  <a:srgbClr val="334155"/>
+                </a:solidFill>
+                <a:latin typeface="Malgun Gothic"/>
+              </a:rPr>
+              <a:t>🔥 AI 웜업으로 몸풀기</a:t>
+            </a:r>
+            <a:r>
+              <a:rPr sz="758">
+                <a:solidFill>
+                  <a:srgbClr val="94A3B8"/>
+                </a:solidFill>
+                <a:latin typeface="Malgun Gothic"/>
+              </a:rPr>
+              <a:t>   ·  p.19</a:t>
+            </a:r>
+          </a:p>
+          <a:p>
+            <a:pPr>
+              <a:spcAft>
+                <a:spcPts val="557"/>
+              </a:spcAft>
+            </a:pPr>
+            <a:r>
+              <a:rPr sz="908" b="1">
+                <a:solidFill>
+                  <a:srgbClr val="4F46E5"/>
+                </a:solidFill>
+                <a:latin typeface="Malgun Gothic"/>
+              </a:rPr>
+              <a:t>17  </a:t>
+            </a:r>
+            <a:r>
+              <a:rPr sz="908">
+                <a:solidFill>
+                  <a:srgbClr val="334155"/>
+                </a:solidFill>
+                <a:latin typeface="Malgun Gothic"/>
+              </a:rPr>
+              <a:t>🎙️ AI 음성 코치</a:t>
+            </a:r>
+            <a:r>
+              <a:rPr sz="758">
+                <a:solidFill>
+                  <a:srgbClr val="94A3B8"/>
+                </a:solidFill>
+                <a:latin typeface="Malgun Gothic"/>
+              </a:rPr>
+              <a:t>   ·  p.20</a:t>
+            </a:r>
+          </a:p>
+          <a:p>
+            <a:pPr>
+              <a:spcAft>
+                <a:spcPts val="557"/>
+              </a:spcAft>
+            </a:pPr>
+            <a:r>
+              <a:rPr sz="908" b="1">
+                <a:solidFill>
+                  <a:srgbClr val="4F46E5"/>
+                </a:solidFill>
+                <a:latin typeface="Malgun Gothic"/>
+              </a:rPr>
+              <a:t>18  </a:t>
+            </a:r>
+            <a:r>
+              <a:rPr sz="908">
+                <a:solidFill>
+                  <a:srgbClr val="334155"/>
+                </a:solidFill>
+                <a:latin typeface="Malgun Gothic"/>
+              </a:rPr>
+              <a:t>📈 레벨 테스트 받기</a:t>
+            </a:r>
+            <a:r>
+              <a:rPr sz="758">
+                <a:solidFill>
+                  <a:srgbClr val="94A3B8"/>
+                </a:solidFill>
+                <a:latin typeface="Malgun Gothic"/>
+              </a:rPr>
+              <a:t>   ·  p.21</a:t>
+            </a:r>
+          </a:p>
+          <a:p>
+            <a:pPr>
+              <a:spcAft>
+                <a:spcPts val="557"/>
+              </a:spcAft>
+            </a:pPr>
+            <a:r>
+              <a:rPr sz="908" b="1">
+                <a:solidFill>
+                  <a:srgbClr val="4F46E5"/>
+                </a:solidFill>
+                <a:latin typeface="Malgun Gothic"/>
+              </a:rPr>
+              <a:t>19  </a:t>
+            </a:r>
+            <a:r>
+              <a:rPr sz="908">
+                <a:solidFill>
+                  <a:srgbClr val="334155"/>
+                </a:solidFill>
+                <a:latin typeface="Malgun Gothic"/>
+              </a:rPr>
+              <a:t>🗺️ 내 레벨 · 커리큘럼</a:t>
+            </a:r>
+            <a:r>
+              <a:rPr sz="758">
+                <a:solidFill>
+                  <a:srgbClr val="94A3B8"/>
+                </a:solidFill>
+                <a:latin typeface="Malgun Gothic"/>
+              </a:rPr>
+              <a:t>   ·  p.22</a:t>
+            </a:r>
+          </a:p>
+          <a:p>
+            <a:pPr>
+              <a:spcAft>
+                <a:spcPts val="557"/>
+              </a:spcAft>
+            </a:pPr>
+            <a:r>
+              <a:rPr sz="908" b="1">
+                <a:solidFill>
+                  <a:srgbClr val="4F46E5"/>
+                </a:solidFill>
+                <a:latin typeface="Malgun Gothic"/>
+              </a:rPr>
+              <a:t>20  </a:t>
+            </a:r>
+            <a:r>
+              <a:rPr sz="908">
+                <a:solidFill>
+                  <a:srgbClr val="334155"/>
+                </a:solidFill>
+                <a:latin typeface="Malgun Gothic"/>
+              </a:rPr>
+              <a:t>🎮 학습 게임 허브</a:t>
+            </a:r>
+            <a:r>
+              <a:rPr sz="758">
+                <a:solidFill>
+                  <a:srgbClr val="94A3B8"/>
+                </a:solidFill>
+                <a:latin typeface="Malgun Gothic"/>
+              </a:rPr>
+              <a:t>   ·  p.23</a:t>
+            </a:r>
+          </a:p>
+          <a:p>
+            <a:pPr>
+              <a:spcAft>
+                <a:spcPts val="557"/>
+              </a:spcAft>
+            </a:pPr>
+            <a:r>
+              <a:rPr sz="908" b="1">
+                <a:solidFill>
+                  <a:srgbClr val="4F46E5"/>
+                </a:solidFill>
+                <a:latin typeface="Malgun Gothic"/>
+              </a:rPr>
+              <a:t>21  </a:t>
+            </a:r>
+            <a:r>
+              <a:rPr sz="908">
+                <a:solidFill>
+                  <a:srgbClr val="334155"/>
+                </a:solidFill>
+                <a:latin typeface="Malgun Gothic"/>
+              </a:rPr>
+              <a:t>⚔️ 3D 배틀</a:t>
+            </a:r>
+            <a:r>
+              <a:rPr sz="758">
+                <a:solidFill>
+                  <a:srgbClr val="94A3B8"/>
+                </a:solidFill>
+                <a:latin typeface="Malgun Gothic"/>
+              </a:rPr>
+              <a:t>   ·  p.24</a:t>
+            </a:r>
+          </a:p>
+          <a:p>
+            <a:pPr>
+              <a:spcAft>
+                <a:spcPts val="557"/>
+              </a:spcAft>
+            </a:pPr>
+            <a:r>
+              <a:rPr sz="908" b="1">
+                <a:solidFill>
+                  <a:srgbClr val="4F46E5"/>
+                </a:solidFill>
+                <a:latin typeface="Malgun Gothic"/>
+              </a:rPr>
+              <a:t>22  </a:t>
+            </a:r>
+            <a:r>
+              <a:rPr sz="908">
+                <a:solidFill>
+                  <a:srgbClr val="334155"/>
+                </a:solidFill>
+                <a:latin typeface="Malgun Gothic"/>
+              </a:rPr>
+              <a:t>🚀 슈팅 · 마스터리 게임</a:t>
+            </a:r>
+            <a:r>
+              <a:rPr sz="758">
+                <a:solidFill>
+                  <a:srgbClr val="94A3B8"/>
+                </a:solidFill>
+                <a:latin typeface="Malgun Gothic"/>
+              </a:rPr>
+              <a:t>   ·  p.25</a:t>
+            </a:r>
+          </a:p>
+        </p:txBody>
+      </p:sp>
+      <p:sp>
+        <p:nvSpPr>
+          <p:cNvPr id="8" name="TextBox 7"/>
+          <p:cNvSpPr txBox="1"/>
+          <p:nvPr/>
+        </p:nvSpPr>
+        <p:spPr>
+          <a:xfrm>
+            <a:off x="6094476" y="1417320"/>
+            <a:ext cx="5500116" cy="5212080"/>
+          </a:xfrm>
+          <a:prstGeom prst="rect">
+            <a:avLst/>
+          </a:prstGeom>
+          <a:noFill/>
+        </p:spPr>
+        <p:txBody>
+          <a:bodyPr wrap="none">
+            <a:spAutoFit/>
+          </a:bodyPr>
+          <a:lstStyle/>
+          <a:p>
+            <a:pPr>
+              <a:spcAft>
+                <a:spcPts val="557"/>
+              </a:spcAft>
+            </a:pPr>
+            <a:r>
+              <a:rPr sz="908" b="1">
+                <a:solidFill>
+                  <a:srgbClr val="4F46E5"/>
+                </a:solidFill>
+                <a:latin typeface="Malgun Gothic"/>
+              </a:rPr>
+              <a:t>23  </a:t>
+            </a:r>
+            <a:r>
+              <a:rPr sz="908">
+                <a:solidFill>
+                  <a:srgbClr val="334155"/>
+                </a:solidFill>
+                <a:latin typeface="Malgun Gothic"/>
+              </a:rPr>
+              <a:t>🧟 워드파이터 (좀비)</a:t>
+            </a:r>
+            <a:r>
+              <a:rPr sz="758">
+                <a:solidFill>
+                  <a:srgbClr val="94A3B8"/>
+                </a:solidFill>
+                <a:latin typeface="Malgun Gothic"/>
+              </a:rPr>
+              <a:t>   ·  p.26</a:t>
+            </a:r>
+          </a:p>
+          <a:p>
+            <a:pPr>
+              <a:spcAft>
+                <a:spcPts val="557"/>
+              </a:spcAft>
+            </a:pPr>
+            <a:r>
+              <a:rPr sz="908" b="1">
+                <a:solidFill>
+                  <a:srgbClr val="4F46E5"/>
+                </a:solidFill>
+                <a:latin typeface="Malgun Gothic"/>
+              </a:rPr>
+              <a:t>24  </a:t>
+            </a:r>
+            <a:r>
+              <a:rPr sz="908">
+                <a:solidFill>
+                  <a:srgbClr val="334155"/>
+                </a:solidFill>
+                <a:latin typeface="Malgun Gothic"/>
+              </a:rPr>
+              <a:t>🕵️ 용의자 추리</a:t>
+            </a:r>
+            <a:r>
+              <a:rPr sz="758">
+                <a:solidFill>
+                  <a:srgbClr val="94A3B8"/>
+                </a:solidFill>
+                <a:latin typeface="Malgun Gothic"/>
+              </a:rPr>
+              <a:t>   ·  p.27</a:t>
+            </a:r>
+          </a:p>
+          <a:p>
+            <a:pPr>
+              <a:spcAft>
+                <a:spcPts val="557"/>
+              </a:spcAft>
+            </a:pPr>
+            <a:r>
+              <a:rPr sz="908" b="1">
+                <a:solidFill>
+                  <a:srgbClr val="4F46E5"/>
+                </a:solidFill>
+                <a:latin typeface="Malgun Gothic"/>
+              </a:rPr>
+              <a:t>25  </a:t>
+            </a:r>
+            <a:r>
+              <a:rPr sz="908">
+                <a:solidFill>
+                  <a:srgbClr val="334155"/>
+                </a:solidFill>
+                <a:latin typeface="Malgun Gothic"/>
+              </a:rPr>
+              <a:t>🗣️ 말하기 퀴즈</a:t>
+            </a:r>
+            <a:r>
+              <a:rPr sz="758">
+                <a:solidFill>
+                  <a:srgbClr val="94A3B8"/>
+                </a:solidFill>
+                <a:latin typeface="Malgun Gothic"/>
+              </a:rPr>
+              <a:t>   ·  p.28</a:t>
+            </a:r>
+          </a:p>
+          <a:p>
+            <a:pPr>
+              <a:spcAft>
+                <a:spcPts val="557"/>
+              </a:spcAft>
+            </a:pPr>
+            <a:r>
+              <a:rPr sz="908" b="1">
+                <a:solidFill>
+                  <a:srgbClr val="4F46E5"/>
+                </a:solidFill>
+                <a:latin typeface="Malgun Gothic"/>
+              </a:rPr>
+              <a:t>26  </a:t>
+            </a:r>
+            <a:r>
+              <a:rPr sz="908">
+                <a:solidFill>
+                  <a:srgbClr val="334155"/>
+                </a:solidFill>
+                <a:latin typeface="Malgun Gothic"/>
+              </a:rPr>
+              <a:t>✅ 복습 퀴즈</a:t>
+            </a:r>
+            <a:r>
+              <a:rPr sz="758">
+                <a:solidFill>
+                  <a:srgbClr val="94A3B8"/>
+                </a:solidFill>
+                <a:latin typeface="Malgun Gothic"/>
+              </a:rPr>
+              <a:t>   ·  p.29</a:t>
+            </a:r>
+          </a:p>
+          <a:p>
+            <a:pPr>
+              <a:spcAft>
+                <a:spcPts val="557"/>
+              </a:spcAft>
+            </a:pPr>
+            <a:r>
+              <a:rPr sz="908" b="1">
+                <a:solidFill>
+                  <a:srgbClr val="4F46E5"/>
+                </a:solidFill>
+                <a:latin typeface="Malgun Gothic"/>
+              </a:rPr>
+              <a:t>27  </a:t>
+            </a:r>
+            <a:r>
+              <a:rPr sz="908">
+                <a:solidFill>
+                  <a:srgbClr val="334155"/>
+                </a:solidFill>
+                <a:latin typeface="Malgun Gothic"/>
+              </a:rPr>
+              <a:t>📚 단어장 (My Vocab)</a:t>
+            </a:r>
+            <a:r>
+              <a:rPr sz="758">
+                <a:solidFill>
+                  <a:srgbClr val="94A3B8"/>
+                </a:solidFill>
+                <a:latin typeface="Malgun Gothic"/>
+              </a:rPr>
+              <a:t>   ·  p.30</a:t>
+            </a:r>
+          </a:p>
+          <a:p>
+            <a:pPr>
+              <a:spcAft>
+                <a:spcPts val="557"/>
+              </a:spcAft>
+            </a:pPr>
+            <a:r>
+              <a:rPr sz="908" b="1">
+                <a:solidFill>
+                  <a:srgbClr val="4F46E5"/>
+                </a:solidFill>
+                <a:latin typeface="Malgun Gothic"/>
+              </a:rPr>
+              <a:t>28  </a:t>
+            </a:r>
+            <a:r>
+              <a:rPr sz="908">
+                <a:solidFill>
+                  <a:srgbClr val="334155"/>
+                </a:solidFill>
+                <a:latin typeface="Malgun Gothic"/>
+              </a:rPr>
+              <a:t>🤖 AI 친구 (Mango)</a:t>
+            </a:r>
+            <a:r>
+              <a:rPr sz="758">
+                <a:solidFill>
+                  <a:srgbClr val="94A3B8"/>
+                </a:solidFill>
+                <a:latin typeface="Malgun Gothic"/>
+              </a:rPr>
+              <a:t>   ·  p.31</a:t>
+            </a:r>
+          </a:p>
+          <a:p>
+            <a:pPr>
+              <a:spcAft>
+                <a:spcPts val="557"/>
+              </a:spcAft>
+            </a:pPr>
+            <a:r>
+              <a:rPr sz="908" b="1">
+                <a:solidFill>
+                  <a:srgbClr val="4F46E5"/>
+                </a:solidFill>
+                <a:latin typeface="Malgun Gothic"/>
+              </a:rPr>
+              <a:t>29  </a:t>
+            </a:r>
+            <a:r>
+              <a:rPr sz="908">
+                <a:solidFill>
+                  <a:srgbClr val="334155"/>
+                </a:solidFill>
+                <a:latin typeface="Malgun Gothic"/>
+              </a:rPr>
+              <a:t>✍️ AI 영작</a:t>
+            </a:r>
+            <a:r>
+              <a:rPr sz="758">
+                <a:solidFill>
+                  <a:srgbClr val="94A3B8"/>
+                </a:solidFill>
+                <a:latin typeface="Malgun Gothic"/>
+              </a:rPr>
+              <a:t>   ·  p.32</a:t>
+            </a:r>
+          </a:p>
+          <a:p>
+            <a:pPr>
+              <a:spcAft>
+                <a:spcPts val="557"/>
+              </a:spcAft>
+            </a:pPr>
+            <a:r>
+              <a:rPr sz="908" b="1">
+                <a:solidFill>
+                  <a:srgbClr val="4F46E5"/>
+                </a:solidFill>
+                <a:latin typeface="Malgun Gothic"/>
+              </a:rPr>
+              <a:t>30  </a:t>
+            </a:r>
+            <a:r>
+              <a:rPr sz="908">
+                <a:solidFill>
+                  <a:srgbClr val="334155"/>
+                </a:solidFill>
+                <a:latin typeface="Malgun Gothic"/>
+              </a:rPr>
+              <a:t>🔥 연속출석 · 배지</a:t>
+            </a:r>
+            <a:r>
+              <a:rPr sz="758">
+                <a:solidFill>
+                  <a:srgbClr val="94A3B8"/>
+                </a:solidFill>
+                <a:latin typeface="Malgun Gothic"/>
+              </a:rPr>
+              <a:t>   ·  p.33</a:t>
+            </a:r>
+          </a:p>
+          <a:p>
+            <a:pPr>
+              <a:spcAft>
+                <a:spcPts val="557"/>
+              </a:spcAft>
+            </a:pPr>
+            <a:r>
+              <a:rPr sz="908" b="1">
+                <a:solidFill>
+                  <a:srgbClr val="4F46E5"/>
+                </a:solidFill>
+                <a:latin typeface="Malgun Gothic"/>
+              </a:rPr>
+              <a:t>31  </a:t>
+            </a:r>
+            <a:r>
+              <a:rPr sz="908">
+                <a:solidFill>
+                  <a:srgbClr val="334155"/>
+                </a:solidFill>
+                <a:latin typeface="Malgun Gothic"/>
+              </a:rPr>
+              <a:t>🧭 MBTI 성향 테스트</a:t>
+            </a:r>
+            <a:r>
+              <a:rPr sz="758">
+                <a:solidFill>
+                  <a:srgbClr val="94A3B8"/>
+                </a:solidFill>
+                <a:latin typeface="Malgun Gothic"/>
+              </a:rPr>
+              <a:t>   ·  p.34</a:t>
+            </a:r>
+          </a:p>
+          <a:p>
+            <a:pPr>
+              <a:spcAft>
+                <a:spcPts val="557"/>
+              </a:spcAft>
+            </a:pPr>
+            <a:r>
+              <a:rPr sz="908" b="1">
+                <a:solidFill>
+                  <a:srgbClr val="4F46E5"/>
+                </a:solidFill>
+                <a:latin typeface="Malgun Gothic"/>
+              </a:rPr>
+              <a:t>32  </a:t>
+            </a:r>
+            <a:r>
+              <a:rPr sz="908">
+                <a:solidFill>
+                  <a:srgbClr val="334155"/>
+                </a:solidFill>
+                <a:latin typeface="Malgun Gothic"/>
+              </a:rPr>
+              <a:t>📅 수업 예약</a:t>
+            </a:r>
+            <a:r>
+              <a:rPr sz="758">
+                <a:solidFill>
+                  <a:srgbClr val="94A3B8"/>
+                </a:solidFill>
+                <a:latin typeface="Malgun Gothic"/>
+              </a:rPr>
+              <a:t>   ·  p.35</a:t>
+            </a:r>
+          </a:p>
+          <a:p>
+            <a:pPr>
+              <a:spcAft>
+                <a:spcPts val="557"/>
+              </a:spcAft>
+            </a:pPr>
+            <a:r>
+              <a:rPr sz="908" b="1">
+                <a:solidFill>
+                  <a:srgbClr val="4F46E5"/>
+                </a:solidFill>
+                <a:latin typeface="Malgun Gothic"/>
+              </a:rPr>
+              <a:t>33  </a:t>
+            </a:r>
+            <a:r>
+              <a:rPr sz="908">
+                <a:solidFill>
+                  <a:srgbClr val="334155"/>
+                </a:solidFill>
+                <a:latin typeface="Malgun Gothic"/>
+              </a:rPr>
+              <a:t>🔄 수업 연기 · 변경</a:t>
+            </a:r>
+            <a:r>
+              <a:rPr sz="758">
+                <a:solidFill>
+                  <a:srgbClr val="94A3B8"/>
+                </a:solidFill>
+                <a:latin typeface="Malgun Gothic"/>
+              </a:rPr>
+              <a:t>   ·  p.36</a:t>
+            </a:r>
+          </a:p>
+          <a:p>
+            <a:pPr>
+              <a:spcAft>
+                <a:spcPts val="557"/>
+              </a:spcAft>
+            </a:pPr>
+            <a:r>
+              <a:rPr sz="908" b="1">
+                <a:solidFill>
+                  <a:srgbClr val="4F46E5"/>
+                </a:solidFill>
+                <a:latin typeface="Malgun Gothic"/>
+              </a:rPr>
+              <a:t>34  </a:t>
+            </a:r>
+            <a:r>
+              <a:rPr sz="908">
+                <a:solidFill>
+                  <a:srgbClr val="334155"/>
+                </a:solidFill>
+                <a:latin typeface="Malgun Gothic"/>
+              </a:rPr>
+              <a:t>👨‍👩‍👧 [학부모] 자녀 학습 한눈에 보기</a:t>
+            </a:r>
+            <a:r>
+              <a:rPr sz="758">
+                <a:solidFill>
+                  <a:srgbClr val="94A3B8"/>
+                </a:solidFill>
+                <a:latin typeface="Malgun Gothic"/>
+              </a:rPr>
+              <a:t>   ·  p.37</a:t>
+            </a:r>
+          </a:p>
+          <a:p>
+            <a:pPr>
+              <a:spcAft>
+                <a:spcPts val="557"/>
+              </a:spcAft>
+            </a:pPr>
+            <a:r>
+              <a:rPr sz="908" b="1">
+                <a:solidFill>
+                  <a:srgbClr val="4F46E5"/>
+                </a:solidFill>
+                <a:latin typeface="Malgun Gothic"/>
+              </a:rPr>
+              <a:t>35  </a:t>
+            </a:r>
+            <a:r>
+              <a:rPr sz="908">
+                <a:solidFill>
+                  <a:srgbClr val="334155"/>
+                </a:solidFill>
+                <a:latin typeface="Malgun Gothic"/>
+              </a:rPr>
+              <a:t>💳 [학부모] 결제·수업 연기·환불</a:t>
+            </a:r>
+            <a:r>
+              <a:rPr sz="758">
+                <a:solidFill>
+                  <a:srgbClr val="94A3B8"/>
+                </a:solidFill>
+                <a:latin typeface="Malgun Gothic"/>
+              </a:rPr>
+              <a:t>   ·  p.38</a:t>
+            </a:r>
+          </a:p>
+          <a:p>
+            <a:pPr>
+              <a:spcAft>
+                <a:spcPts val="557"/>
+              </a:spcAft>
+            </a:pPr>
+            <a:r>
+              <a:rPr sz="908" b="1">
+                <a:solidFill>
+                  <a:srgbClr val="4F46E5"/>
+                </a:solidFill>
+                <a:latin typeface="Malgun Gothic"/>
+              </a:rPr>
+              <a:t>36  </a:t>
+            </a:r>
+            <a:r>
+              <a:rPr sz="908">
+                <a:solidFill>
+                  <a:srgbClr val="334155"/>
+                </a:solidFill>
+                <a:latin typeface="Malgun Gothic"/>
+              </a:rPr>
+              <a:t>🕐 한국·필리핀 듀얼 시계</a:t>
+            </a:r>
+            <a:r>
+              <a:rPr sz="758">
+                <a:solidFill>
+                  <a:srgbClr val="94A3B8"/>
+                </a:solidFill>
+                <a:latin typeface="Malgun Gothic"/>
+              </a:rPr>
+              <a:t>   ·  p.39</a:t>
+            </a:r>
+          </a:p>
+          <a:p>
+            <a:pPr>
+              <a:spcAft>
+                <a:spcPts val="557"/>
+              </a:spcAft>
+            </a:pPr>
+            <a:r>
+              <a:rPr sz="908" b="1">
+                <a:solidFill>
+                  <a:srgbClr val="4F46E5"/>
+                </a:solidFill>
+                <a:latin typeface="Malgun Gothic"/>
+              </a:rPr>
+              <a:t>37  </a:t>
+            </a:r>
+            <a:r>
+              <a:rPr sz="908">
+                <a:solidFill>
+                  <a:srgbClr val="334155"/>
+                </a:solidFill>
+                <a:latin typeface="Malgun Gothic"/>
+              </a:rPr>
+              <a:t>🇨🇳 중국어 발음 코치</a:t>
+            </a:r>
+            <a:r>
+              <a:rPr sz="758">
+                <a:solidFill>
+                  <a:srgbClr val="94A3B8"/>
+                </a:solidFill>
+                <a:latin typeface="Malgun Gothic"/>
+              </a:rPr>
+              <a:t>   ·  p.40</a:t>
+            </a:r>
+          </a:p>
+          <a:p>
+            <a:pPr>
+              <a:spcAft>
+                <a:spcPts val="557"/>
+              </a:spcAft>
+            </a:pPr>
+            <a:r>
+              <a:rPr sz="908" b="1">
+                <a:solidFill>
+                  <a:srgbClr val="4F46E5"/>
+                </a:solidFill>
+                <a:latin typeface="Malgun Gothic"/>
+              </a:rPr>
+              <a:t>38  </a:t>
+            </a:r>
+            <a:r>
+              <a:rPr sz="908">
+                <a:solidFill>
+                  <a:srgbClr val="334155"/>
+                </a:solidFill>
+                <a:latin typeface="Malgun Gothic"/>
+              </a:rPr>
+              <a:t>📔 AI 음성 일기</a:t>
+            </a:r>
+            <a:r>
+              <a:rPr sz="758">
+                <a:solidFill>
+                  <a:srgbClr val="94A3B8"/>
+                </a:solidFill>
+                <a:latin typeface="Malgun Gothic"/>
+              </a:rPr>
+              <a:t>   ·  p.41</a:t>
+            </a:r>
+          </a:p>
+          <a:p>
+            <a:pPr>
+              <a:spcAft>
+                <a:spcPts val="557"/>
+              </a:spcAft>
+            </a:pPr>
+            <a:r>
+              <a:rPr sz="908" b="1">
+                <a:solidFill>
+                  <a:srgbClr val="4F46E5"/>
+                </a:solidFill>
+                <a:latin typeface="Malgun Gothic"/>
+              </a:rPr>
+              <a:t>39  </a:t>
+            </a:r>
+            <a:r>
+              <a:rPr sz="908">
+                <a:solidFill>
+                  <a:srgbClr val="334155"/>
+                </a:solidFill>
+                <a:latin typeface="Malgun Gothic"/>
+              </a:rPr>
+              <a:t>🚀 다음은 어디로? (학습 흐름 안내)</a:t>
+            </a:r>
+            <a:r>
+              <a:rPr sz="758">
+                <a:solidFill>
+                  <a:srgbClr val="94A3B8"/>
+                </a:solidFill>
+                <a:latin typeface="Malgun Gothic"/>
+              </a:rPr>
+              <a:t>   ·  p.42</a:t>
+            </a:r>
+          </a:p>
+          <a:p>
+            <a:pPr>
+              <a:spcAft>
+                <a:spcPts val="557"/>
+              </a:spcAft>
+            </a:pPr>
+            <a:r>
+              <a:rPr sz="908" b="1">
+                <a:solidFill>
+                  <a:srgbClr val="4F46E5"/>
+                </a:solidFill>
+                <a:latin typeface="Malgun Gothic"/>
+              </a:rPr>
+              <a:t>40  </a:t>
+            </a:r>
+            <a:r>
+              <a:rPr sz="908">
+                <a:solidFill>
+                  <a:srgbClr val="334155"/>
+                </a:solidFill>
+                <a:latin typeface="Malgun Gothic"/>
+              </a:rPr>
+              <a:t>🤖 A.i 상담사에게 물어보기</a:t>
+            </a:r>
+            <a:r>
+              <a:rPr sz="758">
+                <a:solidFill>
+                  <a:srgbClr val="94A3B8"/>
+                </a:solidFill>
+                <a:latin typeface="Malgun Gothic"/>
+              </a:rPr>
+              <a:t>   ·  p.43</a:t>
+            </a:r>
+          </a:p>
+          <a:p>
+            <a:pPr>
+              <a:spcAft>
+                <a:spcPts val="557"/>
+              </a:spcAft>
+            </a:pPr>
+            <a:r>
+              <a:rPr sz="908" b="1">
+                <a:solidFill>
+                  <a:srgbClr val="4F46E5"/>
+                </a:solidFill>
+                <a:latin typeface="Malgun Gothic"/>
+              </a:rPr>
+              <a:t>41  </a:t>
+            </a:r>
+            <a:r>
+              <a:rPr sz="908">
+                <a:solidFill>
+                  <a:srgbClr val="334155"/>
+                </a:solidFill>
+                <a:latin typeface="Malgun Gothic"/>
+              </a:rPr>
+              <a:t>학생 기능 한눈에</a:t>
+            </a:r>
+            <a:r>
+              <a:rPr sz="758">
+                <a:solidFill>
+                  <a:srgbClr val="94A3B8"/>
+                </a:solidFill>
+                <a:latin typeface="Malgun Gothic"/>
+              </a:rPr>
+              <a:t>   ·  p.44</a:t>
+            </a:r>
+          </a:p>
+          <a:p>
+            <a:pPr>
+              <a:spcAft>
+                <a:spcPts val="557"/>
+              </a:spcAft>
+            </a:pPr>
+            <a:r>
+              <a:rPr sz="908" b="1">
+                <a:solidFill>
+                  <a:srgbClr val="4F46E5"/>
+                </a:solidFill>
+                <a:latin typeface="Malgun Gothic"/>
+              </a:rPr>
+              <a:t>42  </a:t>
+            </a:r>
+            <a:r>
+              <a:rPr sz="908">
+                <a:solidFill>
+                  <a:srgbClr val="334155"/>
+                </a:solidFill>
+                <a:latin typeface="Malgun Gothic"/>
+              </a:rPr>
+              <a:t>한눈에 보는 데이터</a:t>
+            </a:r>
+            <a:r>
+              <a:rPr sz="758">
+                <a:solidFill>
+                  <a:srgbClr val="94A3B8"/>
+                </a:solidFill>
+                <a:latin typeface="Malgun Gothic"/>
+              </a:rPr>
+              <a:t>   ·  p.45</a:t>
+            </a:r>
+          </a:p>
+          <a:p>
+            <a:pPr>
+              <a:spcAft>
+                <a:spcPts val="557"/>
+              </a:spcAft>
+            </a:pPr>
+            <a:r>
+              <a:rPr sz="908" b="1">
+                <a:solidFill>
+                  <a:srgbClr val="4F46E5"/>
+                </a:solidFill>
+                <a:latin typeface="Malgun Gothic"/>
+              </a:rPr>
+              <a:t>43  </a:t>
+            </a:r>
+            <a:r>
+              <a:rPr sz="908">
+                <a:solidFill>
+                  <a:srgbClr val="334155"/>
+                </a:solidFill>
+                <a:latin typeface="Malgun Gothic"/>
+              </a:rPr>
+              <a:t>자주 묻는 질문 (FAQ)</a:t>
+            </a:r>
+            <a:r>
+              <a:rPr sz="758">
+                <a:solidFill>
+                  <a:srgbClr val="94A3B8"/>
+                </a:solidFill>
+                <a:latin typeface="Malgun Gothic"/>
+              </a:rPr>
+              <a:t>   ·  p.46</a:t>
+            </a:r>
+          </a:p>
+          <a:p>
+            <a:pPr>
+              <a:spcAft>
+                <a:spcPts val="557"/>
+              </a:spcAft>
+            </a:pPr>
+            <a:r>
+              <a:rPr sz="908" b="1">
+                <a:solidFill>
+                  <a:srgbClr val="4F46E5"/>
+                </a:solidFill>
+                <a:latin typeface="Malgun Gothic"/>
+              </a:rPr>
+              <a:t>44  </a:t>
+            </a:r>
+            <a:r>
+              <a:rPr sz="908">
+                <a:solidFill>
+                  <a:srgbClr val="334155"/>
+                </a:solidFill>
+                <a:latin typeface="Malgun Gothic"/>
+              </a:rPr>
+              <a:t>수업 준비 체크리스트</a:t>
+            </a:r>
+            <a:r>
+              <a:rPr sz="758">
+                <a:solidFill>
+                  <a:srgbClr val="94A3B8"/>
+                </a:solidFill>
+                <a:latin typeface="Malgun Gothic"/>
+              </a:rPr>
+              <a:t>   ·  p.47</a:t>
+            </a:r>
+          </a:p>
+          <a:p>
+            <a:pPr>
+              <a:spcAft>
+                <a:spcPts val="557"/>
+              </a:spcAft>
+            </a:pPr>
+            <a:r>
+              <a:rPr sz="908" b="1">
+                <a:solidFill>
+                  <a:srgbClr val="4F46E5"/>
+                </a:solidFill>
+                <a:latin typeface="Malgun Gothic"/>
+              </a:rPr>
+              <a:t>45  </a:t>
+            </a:r>
+            <a:r>
+              <a:rPr sz="908">
+                <a:solidFill>
+                  <a:srgbClr val="334155"/>
+                </a:solidFill>
+                <a:latin typeface="Malgun Gothic"/>
+              </a:rPr>
+              <a:t>마무리 · 혼자서도 척척! 나의 망고아이 학습 루틴</a:t>
+            </a:r>
+            <a:r>
+              <a:rPr sz="758">
+                <a:solidFill>
+                  <a:srgbClr val="94A3B8"/>
+                </a:solidFill>
+                <a:latin typeface="Malgun Gothic"/>
+              </a:rPr>
+              <a:t>   ·  p.48</a:t>
             </a:r>
           </a:p>
         </p:txBody>
